--- a/presentation/LightCheck-KM_oral_KMDay2569.pptx
+++ b/presentation/LightCheck-KM_oral_KMDay2569.pptx
@@ -127,19 +127,19 @@
   <p:extLst>
     <p:ext uri="{521415D9-36F7-43E2-AB2F-B90AF26B5E84}">
       <p14:sectionLst xmlns:p14="http://schemas.microsoft.com/office/powerpoint/2010/main">
-        <p14:section name="เปิดเรื่อง" id="{17936f10-99f4-d24c-bea5-03b893af21e8}">
+        <p14:section name="เปิดเรื่อง" id="{f5fa6dc7-5266-3e7b-99e6-3203502573b0}">
           <p14:sldIdLst>
             <p14:sldId id="256"/>
           </p14:sldIdLst>
         </p14:section>
-        <p14:section name="ทำไมต้องวัดแสง" id="{26eccc3b-3642-d069-ac08-b4899e2772a9}">
+        <p14:section name="ทำไมต้องวัดแสง" id="{9625aa60-a6f3-d3d8-edfc-06fe9047c1b8}">
           <p14:sldIdLst>
             <p14:sldId id="257"/>
             <p14:sldId id="258"/>
             <p14:sldId id="259"/>
           </p14:sldIdLst>
         </p14:section>
-        <p14:section name="แนวคิดและวิธีการ" id="{300297dc-fe0a-0803-448c-a4b827e35c91}">
+        <p14:section name="แนวคิดและวิธีการ" id="{508ef587-d037-536d-8e0e-bb4567f159a5}">
           <p14:sldIdLst>
             <p14:sldId id="260"/>
             <p14:sldId id="261"/>
@@ -149,13 +149,13 @@
             <p14:sldId id="265"/>
           </p14:sldIdLst>
         </p14:section>
-        <p14:section name="ผลลัพธ์" id="{823abad3-d600-900d-ee95-60a6eb59dc42}">
+        <p14:section name="ผลลัพธ์" id="{59f33742-8be4-b413-41f6-9a02cf5801f1}">
           <p14:sldIdLst>
             <p14:sldId id="266"/>
             <p14:sldId id="267"/>
           </p14:sldIdLst>
         </p14:section>
-        <p14:section name="ใช้ประโยชน์และเผยแพร่" id="{4c25e5d2-9e39-e981-761c-bb5bde7ec14f}">
+        <p14:section name="ใช้ประโยชน์และเผยแพร่" id="{510ab7aa-1213-a921-54b3-4afceac8af4c}">
           <p14:sldIdLst>
             <p14:sldId id="268"/>
             <p14:sldId id="269"/>
@@ -163,12 +163,12 @@
             <p14:sldId id="271"/>
           </p14:sldIdLst>
         </p14:section>
-        <p14:section name="สรุป" id="{8979e561-8ad4-dacc-4b7c-9037ef54d564}">
+        <p14:section name="สรุป" id="{7c7b7feb-a096-dbdb-13de-aafc9c4071a9}">
           <p14:sldIdLst>
             <p14:sldId id="272"/>
           </p14:sldIdLst>
         </p14:section>
-        <p14:section name="สำรองตอบคำถาม" id="{beb1c7a4-d5e3-28f8-cc5c-b3827324e5a7}">
+        <p14:section name="สำรองตอบคำถาม" id="{7447f60a-364e-acae-a3f2-2e8f4c2e10d9}">
           <p14:sldIdLst>
             <p14:sldId id="273"/>
             <p14:sldId id="274"/>
@@ -463,7 +463,7 @@
                 <a:latin typeface="+mn-lt"/>
                 <a:cs typeface="+mn-cs"/>
               </a:rPr>
-              <a:t>ความแกว่งของค่าที่อ่าน (CV, %) เมื่อแสงแกว่งต่อครั้งระดับต่าง ๆ</a:t>
+              <a:t>ความแกว่ง (CV, %): ค่าแต่ละครั้ง เทียบค่าบนจอ (เฉลี่ย 5 ค่า)</a:t>
             </a:r>
           </a:p>
         </c:rich>
@@ -4748,7 +4748,7 @@
             <a:r>
               <a:rPr lang="en-US" dirty="0"/>
               <a:t>ค่าจากเซนเซอร์ผ่าน 4 ขั้น: อ่าน ADC สองช่อง แปลงเป็น lux ดิบตามสูตรของไลบรารี เฉลี่ย 5 ค่า แล้วชดเชยด้วยสมการเส้นตรง E corrected = a คูณ E raw เฉลี่ย บวก b
-หาค่า a และ b ด้วย least squares จากการวัดคู่กับเครื่องมาตรฐานเพียงครั้งเดียว และทดสอบความแม่นยำบนข้อมูลอีกชุดคนละ session เพื่อไม่ให้หลอกตัวเอง
+ขั้นตอนที่ออกแบบไว้คือหาค่า a และ b ด้วย least squares จากการวัดคู่กับเครื่องมาตรฐานเพียงครั้งเดียว และทดสอบความแม่นยำบนข้อมูลอีกชุดคนละ session เพื่อป้องกันการประเมินความแม่นยำสูงเกินจริง (ข้อมูลวัดคู่จริงยังเป็นโจทย์ที่เปิดอยู่)
 ตัวอย่างผลจำลอง a = 1.596, b = −4.2: ค่าดิบ 250 lux ชดเชยแล้วได้ 394.8 lux ซึ่งอยู่ในช่วงยืนยันของเกณฑ์ 400 lux จึงต้องวัดซ้ำด้วยเครื่องมาตรฐาน</a:t>
             </a:r>
             <a:endParaRPr lang="en-US" dirty="0"/>
@@ -4929,11 +4929,11 @@
           <a:p>
             <a:r>
               <a:rPr lang="en-US" dirty="0"/>
-              <a:t>นำ LightCheck KM ไปคัดกรองห้องทำงานของสำนักดิจิทัลเทคโนโลยี พบว่าเกือบทุกห้อง ยกเว้นห้องประชุม มีแสงต่ำกว่าระดับมาตรฐาน 10–30%
+              <a:t>นำ LightCheck KM ไปคัดกรองห้องทำงานจริงของสำนักดิจิทัลเทคโนโลยี พบว่าเกือบทุกห้อง ยกเว้นห้องประชุม มีแสงต่ำกว่าระดับมาตรฐาน 10–30%
 ผู้บริหารสำนักฯ วางแผนปรับปรุงทันทีเป็น 2 แนวทาง: ขาดเล็กน้อย เปลี่ยนหลอด LED ให้กำลังวัตต์สูงขึ้น คำนวณจาก P ใหม่ = P เดิม × E เป้าหมาย / E วัดได้ เช่น วัดได้ 270 lux ใช้หลอด 18 W เปลี่ยนเป็น 22 W
 ขาดมาก ติดหลอดเพิ่ม N ใหม่ = ปัดขึ้นของ N เดิม × E เป้าหมาย / E วัดได้ เช่น 220 lux จาก 6 ดวงเป็น 9 ดวง
 สูตรมาจาก lumen method ห้องเดิมโคมเดิม ความส่องสว่างแปรตามฟลักซ์รวม เป้าหมายตั้งเผื่อความคลาดเคลื่อน = เกณฑ์ × (1 + U95) ≈ 322 lux
-ก่อนจัดซื้อให้ยืนยันห้องที่จะลงทุนด้วยเครื่องมาตรฐาน และวัดซ้ำหลังปรับปรุง นี่คือขั้น Act และ Check ของ PDCA</a:t>
+ก่อนจัดซื้อให้ยืนยันห้องที่จะลงทุนด้วยเครื่องมาตรฐาน และวัดซ้ำหลังปรับปรุง นี่คือขั้น Act แล้วต่อด้วย Check ของรอบถัดไป</a:t>
             </a:r>
             <a:endParaRPr lang="en-US" dirty="0"/>
           </a:p>
@@ -5021,7 +5021,7 @@
           <a:p>
             <a:r>
               <a:rPr lang="en-US" dirty="0"/>
-              <a:t>สำหรับคณะหรือส่วนงานที่ไม่มีเจ้าหน้าที่เทคนิค ใช้ได้ใน 5 ขั้น ไม่ต้องรู้เรื่อง firmware หรือสมการ เพราะเครื่องชดเชยค่าให้เอง และจอบอกเมื่อค่านิ่งด้วยเครื่องหมายดาว
+              <a:t>สำหรับคณะหรือส่วนงานที่ไม่มีเจ้าหน้าที่เทคนิค ใช้ได้ใน 5 ขั้น ไม่ต้องรู้เรื่อง firmware หรือสมการ เพราะเครื่องที่สอบเทียบแล้วชดเชยค่าให้เอง และจอบอกเมื่อค่านิ่งด้วยเครื่องหมายดาว
 1 ขอรับการถ่ายทอดหรือประกอบเองตามคู่มือ 2 พิมพ์ผังจุดวัดและแบบบันทึกจากเครื่องมือ grid planner 3 วางเครื่องที่ระดับ 75 ซม. รอจอขึ้นดาวแล้วจดค่า 4 จุดที่อยู่ในแถบสีเหลืองส่งยืนยันด้วยเครื่องมาตรฐาน 5 ปรับปรุงตามสูตรแล้ววัดซ้ำ
 สิ่งที่ได้คือรู้ว่าห้องไหนแสงไม่พอ มีแผนปรับปรุงที่คำนวณได้ และใช้เป็นข้อมูลประกอบ Green Office 5.2.1 ร่วมกับผลยืนยันจากเครื่องมาตรฐาน</a:t>
             </a:r>
@@ -5203,7 +5203,7 @@
               <a:rPr lang="en-US" dirty="0"/>
               <a:t>องค์ความรู้ทั้งชุดเปิดเป็น public repository บน GitHub ให้บุคลากรทุกส่วนงานเข้าถึง ทำซ้ำ และต่อยอดได้เองโดยไม่ต้องขอสิทธิ์
 มีเอกสารและคู่มือ 20 ฉบับ ไฟล์ STL 2 ไฟล์ เครื่องมือ Python 19 ตัว ใช้สัญญาอนุญาต MIT สำหรับโค้ด และ CC BY 4.0 สำหรับเอกสารและฮาร์ดแวร์
-ช่องทางถาม-ตอบและขอรับการถ่ายทอดคือ GitHub Issues คำตอบสะสมเป็นความรู้ให้คนถัดไป และทุกตัวเลขในงานนี้สร้างซ้ำได้ด้วยคำสั่ง make all</a:t>
+ช่องทางถาม-ตอบและขอรับการถ่ายทอดคือ GitHub Issues คำตอบสะสมเป็นความรู้ให้คนถัดไป และทุกตัวเลขจากแบบจำลองสร้างซ้ำได้ด้วยคำสั่ง make all</a:t>
             </a:r>
             <a:endParaRPr lang="en-US" dirty="0"/>
           </a:p>
@@ -5650,7 +5650,7 @@
               <a:t>เริ่มจากคน ไม่ได้เริ่มจากตัวชี้วัด
 สายตาเราปรับตัวกับแสงสลัวได้เก่งมาก จนเรารู้สึกว่าพอ ทั้งที่กล้ามเนื้อตาต้องเพ่งอยู่ตลอดวัน
 หน่วยงานความปลอดภัยของสหราชอาณาจักร (HSE) ระบุผลเสียที่เห็นชัดของแสงไม่เหมาะสม คือ ตาล้า ไมเกรน และปวดศีรษะ และยังเชื่อมโยงกับอาการแบบ sick building syndrome เช่น ซึม หงุดหงิด สมาธิลด
-CCOHS ของแคนาดาระบุว่าแสงที่เหมาะสมช่วยลดอาการตาล้าและปวดศีรษะ และช่วยให้มองเห็นอันตรายจึงลดอุบัติเหตุ
+CCOHS ของแคนาดาระบุว่าแสงที่เหมาะสมช่วยลดอาการตาล้าและปวดศีรษะ และช่วยให้มองเห็นอันตรายได้ชัดขึ้น จึงลดอุบัติเหตุ
 เป้าหมายของงานนี้จึงไม่ใช่การผ่านตัวชี้วัด แต่คือการถนอมสายตาคนทำงานทุกคน ทุกวัน</a:t>
             </a:r>
             <a:endParaRPr lang="en-US" dirty="0"/>
@@ -5739,7 +5739,7 @@
           <a:p>
             <a:r>
               <a:rPr lang="en-US" dirty="0"/>
-              <a:t>ราคาอุปกรณ์เป็นราคาที่ซื้อจริง ส่วนกล่องคิดตามน้ำหนักเส้นพลาสติกที่คาดว่าจะใช้ โดยตัดไฟล์ STL เป็นชั้นละ 0.4 มม. ขอบ 3 เส้นเป็นเนื้อตัน ผิวบนล่าง 0.8 มม. ที่เหลือ infill 20% ได้ 53.6 กรัม คูณ 0.48 บาทต่อกรัม เป็น 25.7 บาท</a:t>
+              <a:t>ราคาอุปกรณ์เป็นราคาที่ซื้อจริง ส่วนกล่องคิดตามน้ำหนักเส้นพลาสติกที่คาดว่าจะใช้ โดยคำนวณปริมาตรจากไฟล์ STL ทีละชั้นหนา 0.4 มม. ขอบ 3 เส้นเป็นเนื้อตัน ผิวบนล่าง 0.8 มม. ที่เหลือ infill 20% ได้ 53.6 กรัม คูณ 0.48 บาทต่อกรัม เป็น 25.7 บาท</a:t>
             </a:r>
             <a:endParaRPr lang="en-US" dirty="0"/>
           </a:p>
@@ -5828,8 +5828,8 @@
             <a:r>
               <a:rPr lang="en-US" dirty="0"/>
               <a:t>ไฟบ้าน 50 Hz คือแรงดันสลับขั้ว 50 รอบต่อวินาที แต่ความสว่างขึ้นกับขนาดของกระแส ไม่ขึ้นกับทิศ ในหนึ่งรอบกระแสขึ้นถึงยอด 2 ครั้ง ช่วงบวกและช่วงลบ
-driver หลอด LED ส่วนใหญ่ใช้วงจรเรียงกระแสเต็มคลื่น แสงจึงสว่าง-หรี่ 100 ครั้งต่อวินาที คาบ 10 ms รายงาน DOE/PNNL ระบุว่าความถี่พื้นฐานของการกระพริบของแหล่งแสงทั่วไปคือ 2 เท่าของความถี่ไฟ
-มีเฉพาะ driver แบบครึ่งคลื่นที่อาจกระพริบ 50 Hz ไม่ว่ากรณีใด integration time 300 ms เท่ากับ 30 รอบของ 100 Hz และ 15 รอบของ 50 Hz พอดี จึงใช้ได้ทั้งสองแบบ</a:t>
+driver หลอด LED ส่วนใหญ่ใช้วงจรเรียงกระแสเต็มคลื่น แสงจึงสว่าง-หรี่ 100 ครั้งต่อวินาที คาบ 10 ms รายงาน DOE/PNNL ระบุว่าความถี่พื้นฐานของการกะพริบของแหล่งแสงทั่วไปคือ 2 เท่าของความถี่ไฟ
+มีเฉพาะ driver แบบครึ่งคลื่นที่อาจกะพริบ 50 Hz ไม่ว่ากรณีใด integration time 300 ms เท่ากับ 30 รอบของ 100 Hz และ 15 รอบของ 50 Hz พอดี จึงใช้ได้ทั้งสองแบบ</a:t>
             </a:r>
             <a:endParaRPr lang="en-US" dirty="0"/>
           </a:p>
@@ -6010,7 +6010,7 @@
               <a:rPr lang="en-US" dirty="0"/>
               <a:t>เครื่องวัดแสงมาตรฐานที่ราคาถูกที่สุดที่สำรวจได้ในตลาดไทยคือ HIOKI FT3424 ราคา 26,340 บาท บวก VAT 7% เป็น 28,183.80 บาท
 สำนักงานมีห้องจำนวนมาก แต่ละห้องต้องวัดหลายจุดตามกริด เครื่องไม่กี่เครื่องจึงวัดไม่ทันทุกห้องทุกปี ส่วนแอปมือถือก็ใช้ไม่ได้ตามเกณฑ์
-ต้นแบบของเราราว 385 บาท ถูกกว่าราว 73 เท่า แต่เราพูดชัดตั้งแต่ต้นว่า ไม่ได้เทียบเท่าเครื่องมาตรฐาน — ต้นแบบมีไว้คัดกรองให้ทั่ว เครื่องมาตรฐานมีไว้ยืนยันผลทางการ</a:t>
+ต้นแบบของเราราว 385 บาท ถูกกว่าราว 73 เท่า แต่ขอชี้แจงตั้งแต่ต้นว่า ไม่ได้เทียบเท่าเครื่องมาตรฐาน — ต้นแบบมีไว้คัดกรองให้ทั่ว เครื่องมาตรฐานมีไว้ยืนยันผลทางการ</a:t>
             </a:r>
             <a:endParaRPr lang="en-US" dirty="0"/>
           </a:p>
@@ -6099,8 +6099,8 @@
             <a:r>
               <a:rPr lang="en-US" dirty="0"/>
               <a:t>นี่คือหัวใจของงาน เราไม่ได้ต้องการเครื่องที่อ่านได้ละเอียดถึงทศนิยมสองตำแหน่ง
-จอแสดง 305.27 lux ดูแม่นยำ แต่ถ้าความคลาดเคลื่อนจริง ±7% ทศนิยมก็ไม่ได้บอกอะไร คำถามที่คนทำงานต้องการคำตอบคือ ห้องนี้แสงพอหรือไม่
-จึงออกแบบเป็นการตัดสินใจ 3 โซนรอบเกณฑ์ 300 lux: ต่ำกว่า 278 = ไม่พอ ปรับปรุงได้เลย, 278–322 = ใกล้เส้น ส่งยืนยันด้วยเครื่องมาตรฐาน, สูงกว่า 322 = พอ
+จอแสดง 305.27 lux ดูแม่นยำ แต่ถ้าความคลาดเคลื่อน ±7.3% (จากแบบจำลอง) ทศนิยมก็ไม่ได้บอกอะไร คำถามที่คนทำงานต้องการคำตอบคือ ห้องนี้แสงพอหรือไม่
+จึงออกแบบเป็นการตัดสินใจ 3 โซนรอบเกณฑ์ 300 lux: ต่ำกว่า 278 = ไม่พอ วางแผนปรับปรุง, 278–322 = ใกล้เส้น ส่งยืนยันด้วยเครื่องมาตรฐาน, สูงกว่า 322 = พอ
 แถบกลางเรียกว่า guard band กว้างเท่าความคลาดเคลื่อน U95 ตามหลัก JCGM 106 ทำให้ใช้เครื่องมาตรฐานเฉพาะจุดที่จำเป็น</a:t>
             </a:r>
             <a:endParaRPr lang="en-US" dirty="0"/>
@@ -6371,7 +6371,7 @@
               <a:rPr lang="en-US" dirty="0"/>
               <a:t>ผังวงจรใช้บัส I²C ร่วมกันเพียง 2 สาย คือ SDA ที่ขา D2 และ SCL ที่ขา D1 เซนเซอร์อยู่ที่แอดเดรส 0x29 จออยู่ที่ 0x3F
 ไฟเลี้ยงมาจากสาย USB-C 5 V ต่อ power bank หรืออะแดปเตอร์มือถือ บอร์ดจ่าย 5 V ให้จอ และแปลงเป็น 3.3 V ให้เซนเซอร์เอง จึงพกไปวัดทุกห้องได้
-กล่องพิมพ์ด้วย Creality Ender-6 ไฟล์ STL เปิดให้ดาวน์โหลด หัวรับแสงเสมอผิวฝาไม่มีขอบบังแสง และมีช่องน็อต 1/4 นิ้วใต้กล่องสำหรับขาตั้งกล้องที่ระดับ 75 ซม. ตามวิธีวัด</a:t>
+กล่องพิมพ์ด้วย Creality Ender-6 ไฟล์ STL เปิดให้ดาวน์โหลด หัวรับแสงเสมอผิวฝาไม่มีขอบบังแสง และมีช่องนอต 1/4 นิ้วใต้กล่องสำหรับขาตั้งกล้องที่ระดับ 75 ซม. ตามวิธีวัด</a:t>
             </a:r>
             <a:endParaRPr lang="en-US" dirty="0"/>
           </a:p>
@@ -6461,9 +6461,9 @@
               <a:rPr lang="en-US" dirty="0"/>
               <a:t>ปัญหาที่เจอจริงตอนลงพื้นที่: ค่าที่อ่านใต้โคม LED กระโดดไปมา และไม่สอดคล้องกับจุดที่มีแสงธรรมชาติผสม
 ข้อแรก LED มีพลังงานช่วงอินฟราเรดน้อยกว่าแสงแดด สูตรของเซนเซอร์สองช่องจึงคลาดเคลื่อนต่างกันตามแหล่งแสง
-ข้อสอง ไฟบ้าน 50 Hz สลับขั้ว 50 รอบต่อวินาที แต่ความสว่างของ LED ขึ้นกับขนาดกระแส ไม่ขึ้นกับทิศ ในหนึ่งรอบจึงสว่างสุด 2 ครั้ง แสงวูบ 100 ครั้งต่อวินาที รายงาน DOE/PNNL ระบุว่าความถี่พื้นฐานของการกระพริบคือ 2 เท่าของความถี่ไฟ
+ข้อสอง ไฟบ้าน 50 Hz สลับขั้ว 50 รอบต่อวินาที แต่ความสว่างของ LED ขึ้นกับขนาดกระแส ไม่ขึ้นกับทิศ ในหนึ่งรอบจึงสว่างสุด 2 ครั้ง แสงวูบ 100 ครั้งต่อวินาที รายงาน DOE/PNNL ระบุว่าความถี่พื้นฐานของการกะพริบคือ 2 เท่าของความถี่ไฟ
 วิธีแก้: integration time 300 ms ซึ่งเท่ากับ 30 รอบของ 100 Hz พอดี (และ 15 รอบของ 50 Hz) เฉลี่ย 5 ค่าล่าสุด และแสดงดาวบนจอเมื่อค่านิ่ง ผลทดสอบในแบบจำลอง firmware ค่าบนจอแกว่งลดลงราว 2 เท่า
-ระหว่างทดสอบยังพบบั๊ก auto-range ของ v1.0 ที่แกว่งจนขึ้น SATURATED 41 ระดับจาก 521 ระดับ v1.1 แก้เหลือศูนย์</a:t>
+ระหว่างทดสอบยังพบข้อบกพร่องของ auto-range ของ v1.0 ที่แกว่งจนขึ้น SATURATED 41 ระดับจาก 521 ระดับ v1.1 แก้เหลือศูนย์</a:t>
             </a:r>
             <a:endParaRPr lang="en-US" dirty="0"/>
           </a:p>
@@ -7790,7 +7790,7 @@
       </p:sp>
       <p:sp>
         <p:nvSpPr>
-          <p:cNvPr id="6" name="ขั้นตอน 184"/>
+          <p:cNvPr id="6" name="ขั้นตอน 186"/>
           <p:cNvSpPr/>
           <p:nvPr/>
         </p:nvSpPr>
@@ -7884,7 +7884,7 @@
       </p:sp>
       <p:sp>
         <p:nvSpPr>
-          <p:cNvPr id="7" name="ลูกศร 185"/>
+          <p:cNvPr id="7" name="ลูกศร 187"/>
           <p:cNvSpPr/>
           <p:nvPr/>
         </p:nvSpPr>
@@ -7908,7 +7908,7 @@
       </p:sp>
       <p:sp>
         <p:nvSpPr>
-          <p:cNvPr id="8" name="ขั้นตอน 186"/>
+          <p:cNvPr id="8" name="ขั้นตอน 188"/>
           <p:cNvSpPr/>
           <p:nvPr/>
         </p:nvSpPr>
@@ -7983,7 +7983,7 @@
       </p:sp>
       <p:sp>
         <p:nvSpPr>
-          <p:cNvPr id="9" name="ลูกศร 187"/>
+          <p:cNvPr id="9" name="ลูกศร 189"/>
           <p:cNvSpPr/>
           <p:nvPr/>
         </p:nvSpPr>
@@ -8007,7 +8007,7 @@
       </p:sp>
       <p:sp>
         <p:nvSpPr>
-          <p:cNvPr id="10" name="ขั้นตอน 188"/>
+          <p:cNvPr id="10" name="ขั้นตอน 190"/>
           <p:cNvSpPr/>
           <p:nvPr/>
         </p:nvSpPr>
@@ -8082,7 +8082,7 @@
       </p:sp>
       <p:sp>
         <p:nvSpPr>
-          <p:cNvPr id="11" name="ลูกศร 189"/>
+          <p:cNvPr id="11" name="ลูกศร 191"/>
           <p:cNvSpPr/>
           <p:nvPr/>
         </p:nvSpPr>
@@ -8106,7 +8106,7 @@
       </p:sp>
       <p:sp>
         <p:nvSpPr>
-          <p:cNvPr id="12" name="ขั้นตอน 190"/>
+          <p:cNvPr id="12" name="ขั้นตอน 192"/>
           <p:cNvSpPr/>
           <p:nvPr/>
         </p:nvSpPr>
@@ -8205,7 +8205,7 @@
       </p:pic>
       <p:sp>
         <p:nvSpPr>
-          <p:cNvPr id="14" name="การ์ดหา a b 191"/>
+          <p:cNvPr id="14" name="การ์ดหา a b 193"/>
           <p:cNvSpPr/>
           <p:nvPr/>
         </p:nvSpPr>
@@ -8229,7 +8229,7 @@
       </p:sp>
       <p:sp>
         <p:nvSpPr>
-          <p:cNvPr id="15" name="ข้อความ 192"/>
+          <p:cNvPr id="15" name="ข้อความ 194"/>
           <p:cNvSpPr txBox="1"/>
           <p:nvPr/>
         </p:nvSpPr>
@@ -8292,7 +8292,7 @@
       </p:pic>
       <p:sp>
         <p:nvSpPr>
-          <p:cNvPr id="17" name="ข้อความ 193"/>
+          <p:cNvPr id="17" name="ข้อความ 195"/>
           <p:cNvSpPr txBox="1"/>
           <p:nvPr/>
         </p:nvSpPr>
@@ -8328,7 +8328,7 @@
       </p:sp>
       <p:sp>
         <p:nvSpPr>
-          <p:cNvPr id="18" name="การ์ดตัวอย่าง 194"/>
+          <p:cNvPr id="18" name="การ์ดตัวอย่าง 196"/>
           <p:cNvSpPr/>
           <p:nvPr/>
         </p:nvSpPr>
@@ -8352,7 +8352,7 @@
       </p:sp>
       <p:sp>
         <p:nvSpPr>
-          <p:cNvPr id="19" name="ป้ายผลจำลอง 195"/>
+          <p:cNvPr id="19" name="ป้ายผลจำลอง 197"/>
           <p:cNvSpPr/>
           <p:nvPr/>
         </p:nvSpPr>
@@ -8394,7 +8394,7 @@
       </p:sp>
       <p:sp>
         <p:nvSpPr>
-          <p:cNvPr id="20" name="ข้อความ 197"/>
+          <p:cNvPr id="20" name="ข้อความ 199"/>
           <p:cNvSpPr txBox="1"/>
           <p:nvPr/>
         </p:nvSpPr>
@@ -8433,7 +8433,7 @@
       </p:sp>
       <p:sp>
         <p:nvSpPr>
-          <p:cNvPr id="21" name="ข้อความ 198"/>
+          <p:cNvPr id="21" name="ข้อความ 200"/>
           <p:cNvSpPr txBox="1"/>
           <p:nvPr/>
         </p:nvSpPr>
@@ -8720,7 +8720,7 @@
       </p:graphicFrame>
       <p:sp>
         <p:nvSpPr>
-          <p:cNvPr id="7" name="ป้ายผลจำลอง 199"/>
+          <p:cNvPr id="7" name="ป้ายผลจำลอง 201"/>
           <p:cNvSpPr/>
           <p:nvPr/>
         </p:nvSpPr>
@@ -8762,7 +8762,7 @@
       </p:sp>
       <p:sp>
         <p:nvSpPr>
-          <p:cNvPr id="8" name="KPI 201"/>
+          <p:cNvPr id="8" name="KPI 203"/>
           <p:cNvSpPr/>
           <p:nvPr/>
         </p:nvSpPr>
@@ -8786,7 +8786,7 @@
       </p:sp>
       <p:sp>
         <p:nvSpPr>
-          <p:cNvPr id="9" name="ข้อความ 202"/>
+          <p:cNvPr id="9" name="ข้อความ 204"/>
           <p:cNvSpPr txBox="1"/>
           <p:nvPr/>
         </p:nvSpPr>
@@ -8825,7 +8825,7 @@
       </p:sp>
       <p:sp>
         <p:nvSpPr>
-          <p:cNvPr id="10" name="ข้อความ 203"/>
+          <p:cNvPr id="10" name="ข้อความ 205"/>
           <p:cNvSpPr txBox="1"/>
           <p:nvPr/>
         </p:nvSpPr>
@@ -8861,7 +8861,7 @@
       </p:sp>
       <p:sp>
         <p:nvSpPr>
-          <p:cNvPr id="11" name="KPI 204"/>
+          <p:cNvPr id="11" name="KPI 206"/>
           <p:cNvSpPr/>
           <p:nvPr/>
         </p:nvSpPr>
@@ -8885,7 +8885,7 @@
       </p:sp>
       <p:sp>
         <p:nvSpPr>
-          <p:cNvPr id="12" name="ข้อความ 205"/>
+          <p:cNvPr id="12" name="ข้อความ 207"/>
           <p:cNvSpPr txBox="1"/>
           <p:nvPr/>
         </p:nvSpPr>
@@ -8924,7 +8924,7 @@
       </p:sp>
       <p:sp>
         <p:nvSpPr>
-          <p:cNvPr id="13" name="ข้อความ 206"/>
+          <p:cNvPr id="13" name="ข้อความ 208"/>
           <p:cNvSpPr txBox="1"/>
           <p:nvPr/>
         </p:nvSpPr>
@@ -8990,7 +8990,7 @@
       </p:graphicFrame>
       <p:sp>
         <p:nvSpPr>
-          <p:cNvPr id="15" name="ข้อความ 207"/>
+          <p:cNvPr id="15" name="ข้อความ 209"/>
           <p:cNvSpPr txBox="1"/>
           <p:nvPr/>
         </p:nvSpPr>
@@ -9164,7 +9164,7 @@
                   <a:schemeClr val="tx1"/>
                 </a:solidFill>
               </a:rPr>
-              <a:t>ผลใช้งานจริง: ห้องทำงานเกือบทุกห้องแสงต่ำกว่ามาตรฐาน 10–30%</a:t>
+              <a:t>ผลคัดกรองจริง: ห้องทำงานเกือบทุกห้องแสงต่ำกว่ามาตรฐาน 10–30%</a:t>
             </a:r>
             <a:endParaRPr lang="en-US" sz="3000" dirty="0"/>
           </a:p>
@@ -9210,7 +9210,7 @@
       </p:sp>
       <p:sp>
         <p:nvSpPr>
-          <p:cNvPr id="6" name="ผลจริง 208"/>
+          <p:cNvPr id="6" name="ผลจริง 210"/>
           <p:cNvSpPr/>
           <p:nvPr/>
         </p:nvSpPr>
@@ -9277,7 +9277,7 @@
       </p:sp>
       <p:sp>
         <p:nvSpPr>
-          <p:cNvPr id="8" name="ข้อความ 210"/>
+          <p:cNvPr id="8" name="ข้อความ 212"/>
           <p:cNvSpPr txBox="1"/>
           <p:nvPr/>
         </p:nvSpPr>
@@ -9316,7 +9316,7 @@
       </p:sp>
       <p:sp>
         <p:nvSpPr>
-          <p:cNvPr id="9" name="ข้อความ 211"/>
+          <p:cNvPr id="9" name="ข้อความ 213"/>
           <p:cNvSpPr txBox="1"/>
           <p:nvPr/>
         </p:nvSpPr>
@@ -9392,7 +9392,7 @@
       </p:sp>
       <p:sp>
         <p:nvSpPr>
-          <p:cNvPr id="10" name="แผนปรับปรุง 212"/>
+          <p:cNvPr id="10" name="แผนปรับปรุง 214"/>
           <p:cNvSpPr/>
           <p:nvPr/>
         </p:nvSpPr>
@@ -9416,7 +9416,7 @@
       </p:sp>
       <p:sp>
         <p:nvSpPr>
-          <p:cNvPr id="11" name="เลขลำดับ 213"/>
+          <p:cNvPr id="11" name="เลขลำดับ 215"/>
           <p:cNvSpPr/>
           <p:nvPr/>
         </p:nvSpPr>
@@ -9457,14 +9457,14 @@
       </p:sp>
       <p:sp>
         <p:nvSpPr>
-          <p:cNvPr id="12" name="ข้อความ 214"/>
+          <p:cNvPr id="12" name="ข้อความ 216"/>
           <p:cNvSpPr txBox="1"/>
           <p:nvPr/>
         </p:nvSpPr>
         <p:spPr>
           <a:xfrm>
             <a:off x="5394960" y="1719072"/>
-            <a:ext cx="2651760" cy="914400"/>
+            <a:ext cx="2852928" cy="914400"/>
           </a:xfrm>
           <a:prstGeom prst="rect">
             <a:avLst/>
@@ -9480,7 +9480,7 @@
               <a:buNone/>
             </a:pPr>
             <a:r>
-              <a:rPr lang="th-TH" altLang="en-US" sz="1800" dirty="0">
+              <a:rPr lang="th-TH" altLang="en-US" sz="1700" dirty="0">
                 <a:solidFill>
                   <a:schemeClr val="tx1"/>
                 </a:solidFill>
@@ -9488,7 +9488,7 @@
                 <a:ea typeface="+mj-ea" pitchFamily="34" charset="-122"/>
                 <a:cs typeface="+mj-cs" pitchFamily="34" charset="-120"/>
               </a:rPr>
-              <a:t>ขาดเล็กน้อย (≤ ~20%)</a:t>
+              <a:t>ขาดเล็กน้อย (ไม่เกินราว 20%)</a:t>
             </a:r>
             <a:endParaRPr lang="th-TH" sz="1600" dirty="0"/>
           </a:p>
@@ -9534,7 +9534,7 @@
       </p:pic>
       <p:sp>
         <p:nvSpPr>
-          <p:cNvPr id="14" name="ข้อความ 215"/>
+          <p:cNvPr id="14" name="ข้อความ 217"/>
           <p:cNvSpPr txBox="1"/>
           <p:nvPr/>
         </p:nvSpPr>
@@ -9570,7 +9570,7 @@
       </p:sp>
       <p:sp>
         <p:nvSpPr>
-          <p:cNvPr id="15" name="แผนปรับปรุง 216"/>
+          <p:cNvPr id="15" name="แผนปรับปรุง 218"/>
           <p:cNvSpPr/>
           <p:nvPr/>
         </p:nvSpPr>
@@ -9594,7 +9594,7 @@
       </p:sp>
       <p:sp>
         <p:nvSpPr>
-          <p:cNvPr id="16" name="เลขลำดับ 217"/>
+          <p:cNvPr id="16" name="เลขลำดับ 219"/>
           <p:cNvSpPr/>
           <p:nvPr/>
         </p:nvSpPr>
@@ -9635,14 +9635,14 @@
       </p:sp>
       <p:sp>
         <p:nvSpPr>
-          <p:cNvPr id="17" name="ข้อความ 218"/>
+          <p:cNvPr id="17" name="ข้อความ 220"/>
           <p:cNvSpPr txBox="1"/>
           <p:nvPr/>
         </p:nvSpPr>
         <p:spPr>
           <a:xfrm>
             <a:off x="5394960" y="3593592"/>
-            <a:ext cx="2651760" cy="914400"/>
+            <a:ext cx="2852928" cy="914400"/>
           </a:xfrm>
           <a:prstGeom prst="rect">
             <a:avLst/>
@@ -9658,7 +9658,7 @@
               <a:buNone/>
             </a:pPr>
             <a:r>
-              <a:rPr lang="th-TH" altLang="en-US" sz="1800" dirty="0">
+              <a:rPr lang="th-TH" altLang="en-US" sz="1700" dirty="0">
                 <a:solidFill>
                   <a:schemeClr val="tx1"/>
                 </a:solidFill>
@@ -9666,7 +9666,7 @@
                 <a:ea typeface="+mj-ea" pitchFamily="34" charset="-122"/>
                 <a:cs typeface="+mj-cs" pitchFamily="34" charset="-120"/>
               </a:rPr>
-              <a:t>ขาดมาก (&gt; ~20%)</a:t>
+              <a:t>ขาดมาก (เกินราว 20%)</a:t>
             </a:r>
             <a:endParaRPr lang="th-TH" sz="1600" dirty="0"/>
           </a:p>
@@ -9712,7 +9712,7 @@
       </p:pic>
       <p:sp>
         <p:nvSpPr>
-          <p:cNvPr id="19" name="ข้อความ 219"/>
+          <p:cNvPr id="19" name="ข้อความ 221"/>
           <p:cNvSpPr txBox="1"/>
           <p:nvPr/>
         </p:nvSpPr>
@@ -9748,7 +9748,7 @@
       </p:sp>
       <p:sp>
         <p:nvSpPr>
-          <p:cNvPr id="20" name="ข้อความ 220"/>
+          <p:cNvPr id="20" name="ข้อความ 222"/>
           <p:cNvSpPr txBox="1"/>
           <p:nvPr/>
         </p:nvSpPr>
@@ -10016,7 +10016,7 @@
       </p:sp>
       <p:sp>
         <p:nvSpPr>
-          <p:cNvPr id="7" name="วงกลมไอคอน 221"/>
+          <p:cNvPr id="7" name="วงกลมไอคอน 223"/>
           <p:cNvSpPr/>
           <p:nvPr/>
         </p:nvSpPr>
@@ -10036,7 +10036,7 @@
       </p:sp>
       <p:pic>
         <p:nvPicPr>
-          <p:cNvPr id="8" name="ไอคอน FaHandHoldingHeart 222" descr="preencoded.png">    </p:cNvPr>
+          <p:cNvPr id="8" name="ไอคอน FaHandHoldingHeart 224" descr="preencoded.png">    </p:cNvPr>
           <p:cNvPicPr>
             <a:picLocks noChangeAspect="1"/>
           </p:cNvPicPr>
@@ -10060,7 +10060,7 @@
       </p:pic>
       <p:sp>
         <p:nvSpPr>
-          <p:cNvPr id="9" name="เลขลำดับ 223"/>
+          <p:cNvPr id="9" name="เลขลำดับ 225"/>
           <p:cNvSpPr/>
           <p:nvPr/>
         </p:nvSpPr>
@@ -10101,7 +10101,7 @@
       </p:sp>
       <p:sp>
         <p:nvSpPr>
-          <p:cNvPr id="10" name="ข้อความ 224"/>
+          <p:cNvPr id="10" name="ข้อความ 226"/>
           <p:cNvSpPr txBox="1"/>
           <p:nvPr/>
         </p:nvSpPr>
@@ -10140,7 +10140,7 @@
       </p:sp>
       <p:sp>
         <p:nvSpPr>
-          <p:cNvPr id="11" name="ข้อความ 225"/>
+          <p:cNvPr id="11" name="ข้อความ 227"/>
           <p:cNvSpPr txBox="1"/>
           <p:nvPr/>
         </p:nvSpPr>
@@ -10176,7 +10176,7 @@
       </p:sp>
       <p:sp>
         <p:nvSpPr>
-          <p:cNvPr id="12" name="วงกลมไอคอน 226"/>
+          <p:cNvPr id="12" name="วงกลมไอคอน 228"/>
           <p:cNvSpPr/>
           <p:nvPr/>
         </p:nvSpPr>
@@ -10196,7 +10196,7 @@
       </p:sp>
       <p:pic>
         <p:nvPicPr>
-          <p:cNvPr id="13" name="ไอคอน FaPrint 227" descr="preencoded.png">    </p:cNvPr>
+          <p:cNvPr id="13" name="ไอคอน FaPrint 229" descr="preencoded.png">    </p:cNvPr>
           <p:cNvPicPr>
             <a:picLocks noChangeAspect="1"/>
           </p:cNvPicPr>
@@ -10220,7 +10220,7 @@
       </p:pic>
       <p:sp>
         <p:nvSpPr>
-          <p:cNvPr id="14" name="เลขลำดับ 228"/>
+          <p:cNvPr id="14" name="เลขลำดับ 230"/>
           <p:cNvSpPr/>
           <p:nvPr/>
         </p:nvSpPr>
@@ -10261,7 +10261,7 @@
       </p:sp>
       <p:sp>
         <p:nvSpPr>
-          <p:cNvPr id="15" name="ข้อความ 229"/>
+          <p:cNvPr id="15" name="ข้อความ 231"/>
           <p:cNvSpPr txBox="1"/>
           <p:nvPr/>
         </p:nvSpPr>
@@ -10300,7 +10300,7 @@
       </p:sp>
       <p:sp>
         <p:nvSpPr>
-          <p:cNvPr id="16" name="ข้อความ 230"/>
+          <p:cNvPr id="16" name="ข้อความ 232"/>
           <p:cNvSpPr txBox="1"/>
           <p:nvPr/>
         </p:nvSpPr>
@@ -10336,7 +10336,7 @@
       </p:sp>
       <p:sp>
         <p:nvSpPr>
-          <p:cNvPr id="17" name="วงกลมไอคอน 231"/>
+          <p:cNvPr id="17" name="วงกลมไอคอน 233"/>
           <p:cNvSpPr/>
           <p:nvPr/>
         </p:nvSpPr>
@@ -10356,7 +10356,7 @@
       </p:sp>
       <p:pic>
         <p:nvPicPr>
-          <p:cNvPr id="18" name="ไอคอน FaClipboardCheck 232" descr="preencoded.png">    </p:cNvPr>
+          <p:cNvPr id="18" name="ไอคอน FaClipboardCheck 234" descr="preencoded.png">    </p:cNvPr>
           <p:cNvPicPr>
             <a:picLocks noChangeAspect="1"/>
           </p:cNvPicPr>
@@ -10380,7 +10380,7 @@
       </p:pic>
       <p:sp>
         <p:nvSpPr>
-          <p:cNvPr id="19" name="เลขลำดับ 233"/>
+          <p:cNvPr id="19" name="เลขลำดับ 235"/>
           <p:cNvSpPr/>
           <p:nvPr/>
         </p:nvSpPr>
@@ -10421,7 +10421,7 @@
       </p:sp>
       <p:sp>
         <p:nvSpPr>
-          <p:cNvPr id="20" name="ข้อความ 234"/>
+          <p:cNvPr id="20" name="ข้อความ 236"/>
           <p:cNvSpPr txBox="1"/>
           <p:nvPr/>
         </p:nvSpPr>
@@ -10452,7 +10452,7 @@
                 <a:ea typeface="+mj-ea" pitchFamily="34" charset="-122"/>
                 <a:cs typeface="+mj-cs" pitchFamily="34" charset="-120"/>
               </a:rPr>
-              <a:t>วัดแล้วจด</a:t>
+              <a:t>วัดและบันทึกค่า</a:t>
             </a:r>
             <a:endParaRPr lang="th-TH" sz="1800" dirty="0"/>
           </a:p>
@@ -10460,7 +10460,7 @@
       </p:sp>
       <p:sp>
         <p:nvSpPr>
-          <p:cNvPr id="21" name="ข้อความ 235"/>
+          <p:cNvPr id="21" name="ข้อความ 237"/>
           <p:cNvSpPr txBox="1"/>
           <p:nvPr/>
         </p:nvSpPr>
@@ -10496,7 +10496,7 @@
       </p:sp>
       <p:sp>
         <p:nvSpPr>
-          <p:cNvPr id="22" name="วงกลมไอคอน 236"/>
+          <p:cNvPr id="22" name="วงกลมไอคอน 238"/>
           <p:cNvSpPr/>
           <p:nvPr/>
         </p:nvSpPr>
@@ -10516,7 +10516,7 @@
       </p:sp>
       <p:pic>
         <p:nvPicPr>
-          <p:cNvPr id="23" name="ไอคอน FaMagnifyingGlass 237" descr="preencoded.png">    </p:cNvPr>
+          <p:cNvPr id="23" name="ไอคอน FaMagnifyingGlass 239" descr="preencoded.png">    </p:cNvPr>
           <p:cNvPicPr>
             <a:picLocks noChangeAspect="1"/>
           </p:cNvPicPr>
@@ -10540,7 +10540,7 @@
       </p:pic>
       <p:sp>
         <p:nvSpPr>
-          <p:cNvPr id="24" name="เลขลำดับ 238"/>
+          <p:cNvPr id="24" name="เลขลำดับ 240"/>
           <p:cNvSpPr/>
           <p:nvPr/>
         </p:nvSpPr>
@@ -10581,7 +10581,7 @@
       </p:sp>
       <p:sp>
         <p:nvSpPr>
-          <p:cNvPr id="25" name="ข้อความ 239"/>
+          <p:cNvPr id="25" name="ข้อความ 241"/>
           <p:cNvSpPr txBox="1"/>
           <p:nvPr/>
         </p:nvSpPr>
@@ -10620,7 +10620,7 @@
       </p:sp>
       <p:sp>
         <p:nvSpPr>
-          <p:cNvPr id="26" name="ข้อความ 240"/>
+          <p:cNvPr id="26" name="ข้อความ 242"/>
           <p:cNvSpPr txBox="1"/>
           <p:nvPr/>
         </p:nvSpPr>
@@ -10656,7 +10656,7 @@
       </p:sp>
       <p:sp>
         <p:nvSpPr>
-          <p:cNvPr id="27" name="วงกลมไอคอน 241"/>
+          <p:cNvPr id="27" name="วงกลมไอคอน 243"/>
           <p:cNvSpPr/>
           <p:nvPr/>
         </p:nvSpPr>
@@ -10676,7 +10676,7 @@
       </p:sp>
       <p:pic>
         <p:nvPicPr>
-          <p:cNvPr id="28" name="ไอคอน FaRotate 242" descr="preencoded.png">    </p:cNvPr>
+          <p:cNvPr id="28" name="ไอคอน FaRotate 244" descr="preencoded.png">    </p:cNvPr>
           <p:cNvPicPr>
             <a:picLocks noChangeAspect="1"/>
           </p:cNvPicPr>
@@ -10700,7 +10700,7 @@
       </p:pic>
       <p:sp>
         <p:nvSpPr>
-          <p:cNvPr id="29" name="เลขลำดับ 243"/>
+          <p:cNvPr id="29" name="เลขลำดับ 245"/>
           <p:cNvSpPr/>
           <p:nvPr/>
         </p:nvSpPr>
@@ -10741,7 +10741,7 @@
       </p:sp>
       <p:sp>
         <p:nvSpPr>
-          <p:cNvPr id="30" name="ข้อความ 244"/>
+          <p:cNvPr id="30" name="ข้อความ 246"/>
           <p:cNvSpPr txBox="1"/>
           <p:nvPr/>
         </p:nvSpPr>
@@ -10780,7 +10780,7 @@
       </p:sp>
       <p:sp>
         <p:nvSpPr>
-          <p:cNvPr id="31" name="ข้อความ 245"/>
+          <p:cNvPr id="31" name="ข้อความ 247"/>
           <p:cNvSpPr txBox="1"/>
           <p:nvPr/>
         </p:nvSpPr>
@@ -10816,7 +10816,7 @@
       </p:sp>
       <p:sp>
         <p:nvSpPr>
-          <p:cNvPr id="32" name="ไม่ต้องรู้ 246"/>
+          <p:cNvPr id="32" name="ไม่ต้องรู้ 248"/>
           <p:cNvSpPr/>
           <p:nvPr/>
         </p:nvSpPr>
@@ -10840,7 +10840,7 @@
       </p:sp>
       <p:sp>
         <p:nvSpPr>
-          <p:cNvPr id="33" name="ข้อความ 247"/>
+          <p:cNvPr id="33" name="ข้อความ 249"/>
           <p:cNvSpPr txBox="1"/>
           <p:nvPr/>
         </p:nvSpPr>
@@ -10891,7 +10891,7 @@
                   <a:schemeClr val="tx1"/>
                 </a:solidFill>
               </a:rPr>
-              <a:t>เครื่องชดเชยค่าให้เอง และจอบอกเมื่อค่านิ่ง (*)</a:t>
+              <a:t>เครื่องที่สอบเทียบแล้วชดเชยค่าเอง จอบอกเมื่อนิ่ง (*)</a:t>
             </a:r>
             <a:endParaRPr lang="th-TH" sz="1600" dirty="0"/>
           </a:p>
@@ -10916,7 +10916,7 @@
       </p:sp>
       <p:sp>
         <p:nvSpPr>
-          <p:cNvPr id="34" name="วงกลมไอคอน 248"/>
+          <p:cNvPr id="34" name="วงกลมไอคอน 250"/>
           <p:cNvSpPr/>
           <p:nvPr/>
         </p:nvSpPr>
@@ -10936,7 +10936,7 @@
       </p:sp>
       <p:pic>
         <p:nvPicPr>
-          <p:cNvPr id="35" name="ไอคอน FaBullseye 249" descr="preencoded.png">    </p:cNvPr>
+          <p:cNvPr id="35" name="ไอคอน FaBullseye 251" descr="preencoded.png">    </p:cNvPr>
           <p:cNvPicPr>
             <a:picLocks noChangeAspect="1"/>
           </p:cNvPicPr>
@@ -10960,7 +10960,7 @@
       </p:pic>
       <p:sp>
         <p:nvSpPr>
-          <p:cNvPr id="36" name="ข้อความ 250"/>
+          <p:cNvPr id="36" name="ข้อความ 252"/>
           <p:cNvSpPr txBox="1"/>
           <p:nvPr/>
         </p:nvSpPr>
@@ -11010,7 +11010,7 @@
       </p:sp>
       <p:sp>
         <p:nvSpPr>
-          <p:cNvPr id="37" name="วงกลมไอคอน 251"/>
+          <p:cNvPr id="37" name="วงกลมไอคอน 253"/>
           <p:cNvSpPr/>
           <p:nvPr/>
         </p:nvSpPr>
@@ -11030,7 +11030,7 @@
       </p:sp>
       <p:pic>
         <p:nvPicPr>
-          <p:cNvPr id="38" name="ไอคอน FaListCheck 252" descr="preencoded.png">    </p:cNvPr>
+          <p:cNvPr id="38" name="ไอคอน FaListCheck 254" descr="preencoded.png">    </p:cNvPr>
           <p:cNvPicPr>
             <a:picLocks noChangeAspect="1"/>
           </p:cNvPicPr>
@@ -11054,7 +11054,7 @@
       </p:pic>
       <p:sp>
         <p:nvSpPr>
-          <p:cNvPr id="39" name="ข้อความ 253"/>
+          <p:cNvPr id="39" name="ข้อความ 255"/>
           <p:cNvSpPr txBox="1"/>
           <p:nvPr/>
         </p:nvSpPr>
@@ -11104,7 +11104,7 @@
       </p:sp>
       <p:sp>
         <p:nvSpPr>
-          <p:cNvPr id="40" name="วงกลมไอคอน 254"/>
+          <p:cNvPr id="40" name="วงกลมไอคอน 256"/>
           <p:cNvSpPr/>
           <p:nvPr/>
         </p:nvSpPr>
@@ -11124,7 +11124,7 @@
       </p:sp>
       <p:pic>
         <p:nvPicPr>
-          <p:cNvPr id="41" name="ไอคอน FaLeaf 255" descr="preencoded.png">    </p:cNvPr>
+          <p:cNvPr id="41" name="ไอคอน FaLeaf 257" descr="preencoded.png">    </p:cNvPr>
           <p:cNvPicPr>
             <a:picLocks noChangeAspect="1"/>
           </p:cNvPicPr>
@@ -11148,7 +11148,7 @@
       </p:pic>
       <p:sp>
         <p:nvSpPr>
-          <p:cNvPr id="42" name="ข้อความ 256"/>
+          <p:cNvPr id="42" name="ข้อความ 258"/>
           <p:cNvSpPr txBox="1"/>
           <p:nvPr/>
         </p:nvSpPr>
@@ -11382,7 +11382,7 @@
       </p:sp>
       <p:sp>
         <p:nvSpPr>
-          <p:cNvPr id="6" name="ข้อความ 257"/>
+          <p:cNvPr id="6" name="ข้อความ 259"/>
           <p:cNvSpPr txBox="1"/>
           <p:nvPr/>
         </p:nvSpPr>
@@ -11421,7 +11421,7 @@
       </p:sp>
       <p:sp>
         <p:nvSpPr>
-          <p:cNvPr id="7" name="ชุดเครื่องมือ 258"/>
+          <p:cNvPr id="7" name="ชุดเครื่องมือ 260"/>
           <p:cNvSpPr/>
           <p:nvPr/>
         </p:nvSpPr>
@@ -11445,7 +11445,7 @@
       </p:sp>
       <p:sp>
         <p:nvSpPr>
-          <p:cNvPr id="8" name="วงกลมไอคอน 259"/>
+          <p:cNvPr id="8" name="วงกลมไอคอน 261"/>
           <p:cNvSpPr/>
           <p:nvPr/>
         </p:nvSpPr>
@@ -11465,7 +11465,7 @@
       </p:sp>
       <p:pic>
         <p:nvPicPr>
-          <p:cNvPr id="9" name="ไอคอน FaMicrochip 260" descr="preencoded.png">    </p:cNvPr>
+          <p:cNvPr id="9" name="ไอคอน FaMicrochip 262" descr="preencoded.png">    </p:cNvPr>
           <p:cNvPicPr>
             <a:picLocks noChangeAspect="1"/>
           </p:cNvPicPr>
@@ -11489,7 +11489,7 @@
       </p:pic>
       <p:sp>
         <p:nvSpPr>
-          <p:cNvPr id="10" name="ข้อความ 261"/>
+          <p:cNvPr id="10" name="ข้อความ 263"/>
           <p:cNvSpPr txBox="1"/>
           <p:nvPr/>
         </p:nvSpPr>
@@ -11528,7 +11528,7 @@
       </p:sp>
       <p:sp>
         <p:nvSpPr>
-          <p:cNvPr id="11" name="ข้อความ 262"/>
+          <p:cNvPr id="11" name="ข้อความ 264"/>
           <p:cNvSpPr txBox="1"/>
           <p:nvPr/>
         </p:nvSpPr>
@@ -11556,7 +11556,7 @@
                   <a:schemeClr val="accent5"/>
                 </a:solidFill>
               </a:rPr>
-              <a:t>Raw/Corrected CSV ทาง Serial · ค่าคงที่สมการ · รุ่นสมการ (traceability)</a:t>
+              <a:t>CSV Raw/Corrected ทาง Serial · บันทึกรุ่นสมการ ตรวจย้อนได้</a:t>
             </a:r>
             <a:endParaRPr lang="th-TH" sz="1350" dirty="0"/>
           </a:p>
@@ -11564,7 +11564,7 @@
       </p:sp>
       <p:sp>
         <p:nvSpPr>
-          <p:cNvPr id="12" name="ชุดเครื่องมือ 263"/>
+          <p:cNvPr id="12" name="ชุดเครื่องมือ 265"/>
           <p:cNvSpPr/>
           <p:nvPr/>
         </p:nvSpPr>
@@ -11588,7 +11588,7 @@
       </p:sp>
       <p:sp>
         <p:nvSpPr>
-          <p:cNvPr id="13" name="วงกลมไอคอน 264"/>
+          <p:cNvPr id="13" name="วงกลมไอคอน 266"/>
           <p:cNvSpPr/>
           <p:nvPr/>
         </p:nvSpPr>
@@ -11608,7 +11608,7 @@
       </p:sp>
       <p:pic>
         <p:nvPicPr>
-          <p:cNvPr id="14" name="ไอคอน FaChartLine 265" descr="preencoded.png">    </p:cNvPr>
+          <p:cNvPr id="14" name="ไอคอน FaChartLine 267" descr="preencoded.png">    </p:cNvPr>
           <p:cNvPicPr>
             <a:picLocks noChangeAspect="1"/>
           </p:cNvPicPr>
@@ -11632,7 +11632,7 @@
       </p:pic>
       <p:sp>
         <p:nvSpPr>
-          <p:cNvPr id="15" name="ข้อความ 266"/>
+          <p:cNvPr id="15" name="ข้อความ 268"/>
           <p:cNvSpPr txBox="1"/>
           <p:nvPr/>
         </p:nvSpPr>
@@ -11671,7 +11671,7 @@
       </p:sp>
       <p:sp>
         <p:nvSpPr>
-          <p:cNvPr id="16" name="ข้อความ 267"/>
+          <p:cNvPr id="16" name="ข้อความ 269"/>
           <p:cNvSpPr txBox="1"/>
           <p:nvPr/>
         </p:nvSpPr>
@@ -11707,7 +11707,7 @@
       </p:sp>
       <p:sp>
         <p:nvSpPr>
-          <p:cNvPr id="17" name="ชุดเครื่องมือ 268"/>
+          <p:cNvPr id="17" name="ชุดเครื่องมือ 270"/>
           <p:cNvSpPr/>
           <p:nvPr/>
         </p:nvSpPr>
@@ -11731,7 +11731,7 @@
       </p:sp>
       <p:sp>
         <p:nvSpPr>
-          <p:cNvPr id="18" name="วงกลมไอคอน 269"/>
+          <p:cNvPr id="18" name="วงกลมไอคอน 271"/>
           <p:cNvSpPr/>
           <p:nvPr/>
         </p:nvSpPr>
@@ -11751,7 +11751,7 @@
       </p:sp>
       <p:pic>
         <p:nvPicPr>
-          <p:cNvPr id="19" name="ไอคอน FaCodeBranch 270" descr="preencoded.png">    </p:cNvPr>
+          <p:cNvPr id="19" name="ไอคอน FaCodeBranch 272" descr="preencoded.png">    </p:cNvPr>
           <p:cNvPicPr>
             <a:picLocks noChangeAspect="1"/>
           </p:cNvPicPr>
@@ -11775,7 +11775,7 @@
       </p:pic>
       <p:sp>
         <p:nvSpPr>
-          <p:cNvPr id="20" name="ข้อความ 271"/>
+          <p:cNvPr id="20" name="ข้อความ 273"/>
           <p:cNvSpPr txBox="1"/>
           <p:nvPr/>
         </p:nvSpPr>
@@ -11814,7 +11814,7 @@
       </p:sp>
       <p:sp>
         <p:nvSpPr>
-          <p:cNvPr id="21" name="ข้อความ 272"/>
+          <p:cNvPr id="21" name="ข้อความ 274"/>
           <p:cNvSpPr txBox="1"/>
           <p:nvPr/>
         </p:nvSpPr>
@@ -11850,7 +11850,7 @@
       </p:sp>
       <p:sp>
         <p:nvSpPr>
-          <p:cNvPr id="22" name="ชุดเครื่องมือ 273"/>
+          <p:cNvPr id="22" name="ชุดเครื่องมือ 275"/>
           <p:cNvSpPr/>
           <p:nvPr/>
         </p:nvSpPr>
@@ -11874,7 +11874,7 @@
       </p:sp>
       <p:sp>
         <p:nvSpPr>
-          <p:cNvPr id="23" name="วงกลมไอคอน 274"/>
+          <p:cNvPr id="23" name="วงกลมไอคอน 276"/>
           <p:cNvSpPr/>
           <p:nvPr/>
         </p:nvSpPr>
@@ -11894,7 +11894,7 @@
       </p:sp>
       <p:pic>
         <p:nvPicPr>
-          <p:cNvPr id="24" name="ไอคอน FaCube 275" descr="preencoded.png">    </p:cNvPr>
+          <p:cNvPr id="24" name="ไอคอน FaCube 277" descr="preencoded.png">    </p:cNvPr>
           <p:cNvPicPr>
             <a:picLocks noChangeAspect="1"/>
           </p:cNvPicPr>
@@ -11918,7 +11918,7 @@
       </p:pic>
       <p:sp>
         <p:nvSpPr>
-          <p:cNvPr id="25" name="ข้อความ 276"/>
+          <p:cNvPr id="25" name="ข้อความ 278"/>
           <p:cNvSpPr txBox="1"/>
           <p:nvPr/>
         </p:nvSpPr>
@@ -11957,7 +11957,7 @@
       </p:sp>
       <p:sp>
         <p:nvSpPr>
-          <p:cNvPr id="26" name="ข้อความ 277"/>
+          <p:cNvPr id="26" name="ข้อความ 279"/>
           <p:cNvSpPr txBox="1"/>
           <p:nvPr/>
         </p:nvSpPr>
@@ -11993,7 +11993,7 @@
       </p:sp>
       <p:sp>
         <p:nvSpPr>
-          <p:cNvPr id="27" name="ข้อความ 278"/>
+          <p:cNvPr id="27" name="ข้อความ 280"/>
           <p:cNvSpPr txBox="1"/>
           <p:nvPr/>
         </p:nvSpPr>
@@ -12024,7 +12024,7 @@
                 <a:ea typeface="+mj-ea" pitchFamily="34" charset="-122"/>
                 <a:cs typeface="+mj-cs" pitchFamily="34" charset="-120"/>
               </a:rPr>
-              <a:t>ตัวอย่างต่อยอด: Wi-Fi + dashboard</a:t>
+              <a:t>ตัวอย่างต่อยอด (แนวคิด): Wi-Fi + dashboard</a:t>
             </a:r>
             <a:endParaRPr lang="th-TH" sz="1900" dirty="0"/>
           </a:p>
@@ -12032,7 +12032,7 @@
       </p:sp>
       <p:sp>
         <p:nvSpPr>
-          <p:cNvPr id="28" name="ขั้นต่อยอด 279"/>
+          <p:cNvPr id="28" name="ขั้นต่อยอด 281"/>
           <p:cNvSpPr/>
           <p:nvPr/>
         </p:nvSpPr>
@@ -12093,7 +12093,7 @@
       </p:sp>
       <p:sp>
         <p:nvSpPr>
-          <p:cNvPr id="29" name="ลูกศร 280"/>
+          <p:cNvPr id="29" name="ลูกศร 282"/>
           <p:cNvSpPr/>
           <p:nvPr/>
         </p:nvSpPr>
@@ -12117,7 +12117,7 @@
       </p:sp>
       <p:sp>
         <p:nvSpPr>
-          <p:cNvPr id="30" name="ขั้นต่อยอด 281"/>
+          <p:cNvPr id="30" name="ขั้นต่อยอด 283"/>
           <p:cNvSpPr/>
           <p:nvPr/>
         </p:nvSpPr>
@@ -12178,7 +12178,7 @@
       </p:sp>
       <p:sp>
         <p:nvSpPr>
-          <p:cNvPr id="31" name="ลูกศร 282"/>
+          <p:cNvPr id="31" name="ลูกศร 284"/>
           <p:cNvSpPr/>
           <p:nvPr/>
         </p:nvSpPr>
@@ -12202,7 +12202,7 @@
       </p:sp>
       <p:sp>
         <p:nvSpPr>
-          <p:cNvPr id="32" name="ขั้นต่อยอด 283"/>
+          <p:cNvPr id="32" name="ขั้นต่อยอด 285"/>
           <p:cNvSpPr/>
           <p:nvPr/>
         </p:nvSpPr>
@@ -12263,7 +12263,7 @@
       </p:sp>
       <p:sp>
         <p:nvSpPr>
-          <p:cNvPr id="33" name="ลูกศร 284"/>
+          <p:cNvPr id="33" name="ลูกศร 286"/>
           <p:cNvSpPr/>
           <p:nvPr/>
         </p:nvSpPr>
@@ -12287,7 +12287,7 @@
       </p:sp>
       <p:sp>
         <p:nvSpPr>
-          <p:cNvPr id="34" name="ขั้นต่อยอด 285"/>
+          <p:cNvPr id="34" name="ขั้นต่อยอด 287"/>
           <p:cNvSpPr/>
           <p:nvPr/>
         </p:nvSpPr>
@@ -12558,7 +12558,7 @@
       </p:pic>
       <p:sp>
         <p:nvSpPr>
-          <p:cNvPr id="7" name="ข้อความ 286"/>
+          <p:cNvPr id="7" name="ข้อความ 288"/>
           <p:cNvSpPr txBox="1"/>
           <p:nvPr/>
         </p:nvSpPr>
@@ -12628,7 +12628,7 @@
       </p:pic>
       <p:sp>
         <p:nvSpPr>
-          <p:cNvPr id="9" name="ข้อความ 287"/>
+          <p:cNvPr id="9" name="ข้อความ 289"/>
           <p:cNvSpPr txBox="1"/>
           <p:nvPr/>
         </p:nvSpPr>
@@ -12664,7 +12664,7 @@
       </p:sp>
       <p:sp>
         <p:nvSpPr>
-          <p:cNvPr id="10" name="สถิติ 288"/>
+          <p:cNvPr id="10" name="สถิติ 290"/>
           <p:cNvSpPr/>
           <p:nvPr/>
         </p:nvSpPr>
@@ -12688,7 +12688,7 @@
       </p:sp>
       <p:sp>
         <p:nvSpPr>
-          <p:cNvPr id="11" name="ข้อความ 289"/>
+          <p:cNvPr id="11" name="ข้อความ 291"/>
           <p:cNvSpPr txBox="1"/>
           <p:nvPr/>
         </p:nvSpPr>
@@ -12727,7 +12727,7 @@
       </p:sp>
       <p:sp>
         <p:nvSpPr>
-          <p:cNvPr id="12" name="ข้อความ 290"/>
+          <p:cNvPr id="12" name="ข้อความ 292"/>
           <p:cNvSpPr txBox="1"/>
           <p:nvPr/>
         </p:nvSpPr>
@@ -12763,7 +12763,7 @@
       </p:sp>
       <p:sp>
         <p:nvSpPr>
-          <p:cNvPr id="13" name="สถิติ 291"/>
+          <p:cNvPr id="13" name="สถิติ 293"/>
           <p:cNvSpPr/>
           <p:nvPr/>
         </p:nvSpPr>
@@ -12787,7 +12787,7 @@
       </p:sp>
       <p:sp>
         <p:nvSpPr>
-          <p:cNvPr id="14" name="ข้อความ 292"/>
+          <p:cNvPr id="14" name="ข้อความ 294"/>
           <p:cNvSpPr txBox="1"/>
           <p:nvPr/>
         </p:nvSpPr>
@@ -12826,7 +12826,7 @@
       </p:sp>
       <p:sp>
         <p:nvSpPr>
-          <p:cNvPr id="15" name="ข้อความ 293"/>
+          <p:cNvPr id="15" name="ข้อความ 295"/>
           <p:cNvSpPr txBox="1"/>
           <p:nvPr/>
         </p:nvSpPr>
@@ -12862,7 +12862,7 @@
       </p:sp>
       <p:sp>
         <p:nvSpPr>
-          <p:cNvPr id="16" name="สถิติ 294"/>
+          <p:cNvPr id="16" name="สถิติ 296"/>
           <p:cNvSpPr/>
           <p:nvPr/>
         </p:nvSpPr>
@@ -12886,7 +12886,7 @@
       </p:sp>
       <p:sp>
         <p:nvSpPr>
-          <p:cNvPr id="17" name="ข้อความ 295"/>
+          <p:cNvPr id="17" name="ข้อความ 297"/>
           <p:cNvSpPr txBox="1"/>
           <p:nvPr/>
         </p:nvSpPr>
@@ -12925,7 +12925,7 @@
       </p:sp>
       <p:sp>
         <p:nvSpPr>
-          <p:cNvPr id="18" name="ข้อความ 296"/>
+          <p:cNvPr id="18" name="ข้อความ 298"/>
           <p:cNvSpPr txBox="1"/>
           <p:nvPr/>
         </p:nvSpPr>
@@ -12961,7 +12961,7 @@
       </p:sp>
       <p:sp>
         <p:nvSpPr>
-          <p:cNvPr id="19" name="สถิติ 297"/>
+          <p:cNvPr id="19" name="สถิติ 299"/>
           <p:cNvSpPr/>
           <p:nvPr/>
         </p:nvSpPr>
@@ -12985,7 +12985,7 @@
       </p:sp>
       <p:sp>
         <p:nvSpPr>
-          <p:cNvPr id="20" name="ข้อความ 298"/>
+          <p:cNvPr id="20" name="ข้อความ 300"/>
           <p:cNvSpPr txBox="1"/>
           <p:nvPr/>
         </p:nvSpPr>
@@ -13024,7 +13024,7 @@
       </p:sp>
       <p:sp>
         <p:nvSpPr>
-          <p:cNvPr id="21" name="ข้อความ 299"/>
+          <p:cNvPr id="21" name="ข้อความ 301"/>
           <p:cNvSpPr txBox="1"/>
           <p:nvPr/>
         </p:nvSpPr>
@@ -13060,7 +13060,7 @@
       </p:sp>
       <p:sp>
         <p:nvSpPr>
-          <p:cNvPr id="22" name="วงกลมไอคอน 300"/>
+          <p:cNvPr id="22" name="วงกลมไอคอน 302"/>
           <p:cNvSpPr/>
           <p:nvPr/>
         </p:nvSpPr>
@@ -13080,7 +13080,7 @@
       </p:sp>
       <p:pic>
         <p:nvPicPr>
-          <p:cNvPr id="23" name="ไอคอน FaGithub 301" descr="preencoded.png">    </p:cNvPr>
+          <p:cNvPr id="23" name="ไอคอน FaGithub 303" descr="preencoded.png">    </p:cNvPr>
           <p:cNvPicPr>
             <a:picLocks noChangeAspect="1"/>
           </p:cNvPicPr>
@@ -13104,7 +13104,7 @@
       </p:pic>
       <p:sp>
         <p:nvSpPr>
-          <p:cNvPr id="24" name="ข้อความ 302"/>
+          <p:cNvPr id="24" name="ข้อความ 304"/>
           <p:cNvSpPr txBox="1"/>
           <p:nvPr/>
         </p:nvSpPr>
@@ -13157,7 +13157,7 @@
       </p:sp>
       <p:sp>
         <p:nvSpPr>
-          <p:cNvPr id="25" name="วงกลมไอคอน 303"/>
+          <p:cNvPr id="25" name="วงกลมไอคอน 305"/>
           <p:cNvSpPr/>
           <p:nvPr/>
         </p:nvSpPr>
@@ -13177,7 +13177,7 @@
       </p:sp>
       <p:pic>
         <p:nvPicPr>
-          <p:cNvPr id="26" name="ไอคอน FaCircleQuestion 304" descr="preencoded.png">    </p:cNvPr>
+          <p:cNvPr id="26" name="ไอคอน FaCircleQuestion 306" descr="preencoded.png">    </p:cNvPr>
           <p:cNvPicPr>
             <a:picLocks noChangeAspect="1"/>
           </p:cNvPicPr>
@@ -13201,7 +13201,7 @@
       </p:pic>
       <p:sp>
         <p:nvSpPr>
-          <p:cNvPr id="27" name="ข้อความ 305"/>
+          <p:cNvPr id="27" name="ข้อความ 307"/>
           <p:cNvSpPr txBox="1"/>
           <p:nvPr/>
         </p:nvSpPr>
@@ -13254,7 +13254,7 @@
       </p:sp>
       <p:sp>
         <p:nvSpPr>
-          <p:cNvPr id="28" name="วงกลมไอคอน 306"/>
+          <p:cNvPr id="28" name="วงกลมไอคอน 308"/>
           <p:cNvSpPr/>
           <p:nvPr/>
         </p:nvSpPr>
@@ -13274,7 +13274,7 @@
       </p:sp>
       <p:pic>
         <p:nvPicPr>
-          <p:cNvPr id="29" name="ไอคอน FaQrcode 307" descr="preencoded.png">    </p:cNvPr>
+          <p:cNvPr id="29" name="ไอคอน FaQrcode 309" descr="preencoded.png">    </p:cNvPr>
           <p:cNvPicPr>
             <a:picLocks noChangeAspect="1"/>
           </p:cNvPicPr>
@@ -13298,7 +13298,7 @@
       </p:pic>
       <p:sp>
         <p:nvSpPr>
-          <p:cNvPr id="30" name="ข้อความ 308"/>
+          <p:cNvPr id="30" name="ข้อความ 310"/>
           <p:cNvSpPr txBox="1"/>
           <p:nvPr/>
         </p:nvSpPr>
@@ -13351,7 +13351,7 @@
       </p:sp>
       <p:sp>
         <p:nvSpPr>
-          <p:cNvPr id="31" name="วงกลมไอคอน 309"/>
+          <p:cNvPr id="31" name="วงกลมไอคอน 311"/>
           <p:cNvSpPr/>
           <p:nvPr/>
         </p:nvSpPr>
@@ -13371,7 +13371,7 @@
       </p:sp>
       <p:pic>
         <p:nvPicPr>
-          <p:cNvPr id="32" name="ไอคอน FaRotate 310" descr="preencoded.png">    </p:cNvPr>
+          <p:cNvPr id="32" name="ไอคอน FaRotate 312" descr="preencoded.png">    </p:cNvPr>
           <p:cNvPicPr>
             <a:picLocks noChangeAspect="1"/>
           </p:cNvPicPr>
@@ -13395,7 +13395,7 @@
       </p:pic>
       <p:sp>
         <p:nvSpPr>
-          <p:cNvPr id="33" name="ข้อความ 311"/>
+          <p:cNvPr id="33" name="ข้อความ 313"/>
           <p:cNvSpPr txBox="1"/>
           <p:nvPr/>
         </p:nvSpPr>
@@ -13426,7 +13426,7 @@
                 <a:ea typeface="+mj-ea" pitchFamily="34" charset="-122"/>
                 <a:cs typeface="+mj-cs" pitchFamily="34" charset="-120"/>
               </a:rPr>
-              <a:t>ทำซ้ำได้ทุกตัวเลข</a:t>
+              <a:t>สร้างผลจำลองซ้ำได้</a:t>
             </a:r>
             <a:endParaRPr lang="th-TH" sz="1600" dirty="0"/>
           </a:p>
@@ -13586,7 +13586,7 @@
                   <a:schemeClr val="tx1"/>
                 </a:solidFill>
               </a:rPr>
-              <a:t>ช่องว่างที่ยังเปิดอยู่: ข้อจำกัดของวันนี้ คือโจทย์ให้ร่วมพัฒนา</a:t>
+              <a:t>ช่องว่างที่ยังเปิดอยู่: ข้อจำกัดในปัจจุบัน คือโจทย์ที่เปิดให้ร่วมพัฒนา</a:t>
             </a:r>
             <a:endParaRPr lang="en-US" sz="3000" dirty="0"/>
           </a:p>
@@ -13632,7 +13632,7 @@
       </p:sp>
       <p:sp>
         <p:nvSpPr>
-          <p:cNvPr id="6" name="ข้อความ 312"/>
+          <p:cNvPr id="6" name="ข้อความ 314"/>
           <p:cNvSpPr txBox="1"/>
           <p:nvPr/>
         </p:nvSpPr>
@@ -13671,7 +13671,7 @@
       </p:sp>
       <p:sp>
         <p:nvSpPr>
-          <p:cNvPr id="7" name="ข้อจำกัด 313"/>
+          <p:cNvPr id="7" name="ข้อจำกัด 315"/>
           <p:cNvSpPr/>
           <p:nvPr/>
         </p:nvSpPr>
@@ -13695,7 +13695,7 @@
       </p:sp>
       <p:sp>
         <p:nvSpPr>
-          <p:cNvPr id="8" name="ข้อความ 314"/>
+          <p:cNvPr id="8" name="ข้อความ 316"/>
           <p:cNvSpPr txBox="1"/>
           <p:nvPr/>
         </p:nvSpPr>
@@ -13731,7 +13731,7 @@
       </p:sp>
       <p:sp>
         <p:nvSpPr>
-          <p:cNvPr id="9" name="ข้อจำกัด 315"/>
+          <p:cNvPr id="9" name="ข้อจำกัด 317"/>
           <p:cNvSpPr/>
           <p:nvPr/>
         </p:nvSpPr>
@@ -13755,7 +13755,7 @@
       </p:sp>
       <p:sp>
         <p:nvSpPr>
-          <p:cNvPr id="10" name="ข้อความ 316"/>
+          <p:cNvPr id="10" name="ข้อความ 318"/>
           <p:cNvSpPr txBox="1"/>
           <p:nvPr/>
         </p:nvSpPr>
@@ -13791,7 +13791,7 @@
       </p:sp>
       <p:sp>
         <p:nvSpPr>
-          <p:cNvPr id="11" name="ข้อจำกัด 317"/>
+          <p:cNvPr id="11" name="ข้อจำกัด 319"/>
           <p:cNvSpPr/>
           <p:nvPr/>
         </p:nvSpPr>
@@ -13815,7 +13815,7 @@
       </p:sp>
       <p:sp>
         <p:nvSpPr>
-          <p:cNvPr id="12" name="ข้อความ 318"/>
+          <p:cNvPr id="12" name="ข้อความ 320"/>
           <p:cNvSpPr txBox="1"/>
           <p:nvPr/>
         </p:nvSpPr>
@@ -13851,7 +13851,7 @@
       </p:sp>
       <p:sp>
         <p:nvSpPr>
-          <p:cNvPr id="13" name="ข้อจำกัด 319"/>
+          <p:cNvPr id="13" name="ข้อจำกัด 321"/>
           <p:cNvSpPr/>
           <p:nvPr/>
         </p:nvSpPr>
@@ -13875,7 +13875,7 @@
       </p:sp>
       <p:sp>
         <p:nvSpPr>
-          <p:cNvPr id="14" name="ข้อความ 320"/>
+          <p:cNvPr id="14" name="ข้อความ 322"/>
           <p:cNvSpPr txBox="1"/>
           <p:nvPr/>
         </p:nvSpPr>
@@ -13911,7 +13911,7 @@
       </p:sp>
       <p:sp>
         <p:nvSpPr>
-          <p:cNvPr id="15" name="ลูกศร 321"/>
+          <p:cNvPr id="15" name="ลูกศร 323"/>
           <p:cNvSpPr/>
           <p:nvPr/>
         </p:nvSpPr>
@@ -13935,7 +13935,7 @@
       </p:sp>
       <p:sp>
         <p:nvSpPr>
-          <p:cNvPr id="16" name="ข้อความ 322"/>
+          <p:cNvPr id="16" name="ข้อความ 324"/>
           <p:cNvSpPr txBox="1"/>
           <p:nvPr/>
         </p:nvSpPr>
@@ -13974,7 +13974,7 @@
       </p:sp>
       <p:sp>
         <p:nvSpPr>
-          <p:cNvPr id="17" name="โจทย์ 323"/>
+          <p:cNvPr id="17" name="โจทย์ 325"/>
           <p:cNvSpPr/>
           <p:nvPr/>
         </p:nvSpPr>
@@ -13998,7 +13998,7 @@
       </p:sp>
       <p:sp>
         <p:nvSpPr>
-          <p:cNvPr id="18" name="ข้อความ 324"/>
+          <p:cNvPr id="18" name="ข้อความ 326"/>
           <p:cNvSpPr txBox="1"/>
           <p:nvPr/>
         </p:nvSpPr>
@@ -14051,7 +14051,7 @@
       </p:sp>
       <p:sp>
         <p:nvSpPr>
-          <p:cNvPr id="19" name="ระดับ 325"/>
+          <p:cNvPr id="19" name="ระดับ 327"/>
           <p:cNvSpPr/>
           <p:nvPr/>
         </p:nvSpPr>
@@ -14091,7 +14091,7 @@
       </p:sp>
       <p:sp>
         <p:nvSpPr>
-          <p:cNvPr id="20" name="โจทย์ 327"/>
+          <p:cNvPr id="20" name="โจทย์ 329"/>
           <p:cNvSpPr/>
           <p:nvPr/>
         </p:nvSpPr>
@@ -14115,7 +14115,7 @@
       </p:sp>
       <p:sp>
         <p:nvSpPr>
-          <p:cNvPr id="21" name="ข้อความ 328"/>
+          <p:cNvPr id="21" name="ข้อความ 330"/>
           <p:cNvSpPr txBox="1"/>
           <p:nvPr/>
         </p:nvSpPr>
@@ -14168,7 +14168,7 @@
       </p:sp>
       <p:sp>
         <p:nvSpPr>
-          <p:cNvPr id="22" name="ระดับ 329"/>
+          <p:cNvPr id="22" name="ระดับ 331"/>
           <p:cNvSpPr/>
           <p:nvPr/>
         </p:nvSpPr>
@@ -14208,7 +14208,7 @@
       </p:sp>
       <p:sp>
         <p:nvSpPr>
-          <p:cNvPr id="23" name="โจทย์ 331"/>
+          <p:cNvPr id="23" name="โจทย์ 333"/>
           <p:cNvSpPr/>
           <p:nvPr/>
         </p:nvSpPr>
@@ -14232,7 +14232,7 @@
       </p:sp>
       <p:sp>
         <p:nvSpPr>
-          <p:cNvPr id="24" name="ข้อความ 332"/>
+          <p:cNvPr id="24" name="ข้อความ 334"/>
           <p:cNvSpPr txBox="1"/>
           <p:nvPr/>
         </p:nvSpPr>
@@ -14285,7 +14285,7 @@
       </p:sp>
       <p:sp>
         <p:nvSpPr>
-          <p:cNvPr id="25" name="ระดับ 333"/>
+          <p:cNvPr id="25" name="ระดับ 335"/>
           <p:cNvSpPr/>
           <p:nvPr/>
         </p:nvSpPr>
@@ -14325,7 +14325,7 @@
       </p:sp>
       <p:sp>
         <p:nvSpPr>
-          <p:cNvPr id="26" name="โจทย์ 335"/>
+          <p:cNvPr id="26" name="โจทย์ 337"/>
           <p:cNvSpPr/>
           <p:nvPr/>
         </p:nvSpPr>
@@ -14349,7 +14349,7 @@
       </p:sp>
       <p:sp>
         <p:nvSpPr>
-          <p:cNvPr id="27" name="ข้อความ 336"/>
+          <p:cNvPr id="27" name="ข้อความ 338"/>
           <p:cNvSpPr txBox="1"/>
           <p:nvPr/>
         </p:nvSpPr>
@@ -14402,7 +14402,7 @@
       </p:sp>
       <p:sp>
         <p:nvSpPr>
-          <p:cNvPr id="28" name="ระดับ 337"/>
+          <p:cNvPr id="28" name="ระดับ 339"/>
           <p:cNvSpPr/>
           <p:nvPr/>
         </p:nvSpPr>
@@ -14442,7 +14442,7 @@
       </p:sp>
       <p:sp>
         <p:nvSpPr>
-          <p:cNvPr id="29" name="โจทย์ 339"/>
+          <p:cNvPr id="29" name="โจทย์ 341"/>
           <p:cNvSpPr/>
           <p:nvPr/>
         </p:nvSpPr>
@@ -14466,7 +14466,7 @@
       </p:sp>
       <p:sp>
         <p:nvSpPr>
-          <p:cNvPr id="30" name="ข้อความ 340"/>
+          <p:cNvPr id="30" name="ข้อความ 342"/>
           <p:cNvSpPr txBox="1"/>
           <p:nvPr/>
         </p:nvSpPr>
@@ -14519,7 +14519,7 @@
       </p:sp>
       <p:sp>
         <p:nvSpPr>
-          <p:cNvPr id="31" name="ระดับ 341"/>
+          <p:cNvPr id="31" name="ระดับ 343"/>
           <p:cNvSpPr/>
           <p:nvPr/>
         </p:nvSpPr>
@@ -14559,7 +14559,7 @@
       </p:sp>
       <p:sp>
         <p:nvSpPr>
-          <p:cNvPr id="32" name="โจทย์ 343"/>
+          <p:cNvPr id="32" name="โจทย์ 345"/>
           <p:cNvSpPr/>
           <p:nvPr/>
         </p:nvSpPr>
@@ -14583,7 +14583,7 @@
       </p:sp>
       <p:sp>
         <p:nvSpPr>
-          <p:cNvPr id="33" name="ข้อความ 344"/>
+          <p:cNvPr id="33" name="ข้อความ 346"/>
           <p:cNvSpPr txBox="1"/>
           <p:nvPr/>
         </p:nvSpPr>
@@ -14636,7 +14636,7 @@
       </p:sp>
       <p:sp>
         <p:nvSpPr>
-          <p:cNvPr id="34" name="ระดับ 345"/>
+          <p:cNvPr id="34" name="ระดับ 347"/>
           <p:cNvSpPr/>
           <p:nvPr/>
         </p:nvSpPr>
@@ -14676,7 +14676,7 @@
       </p:sp>
       <p:sp>
         <p:nvSpPr>
-          <p:cNvPr id="35" name="วิธีร่วม 347"/>
+          <p:cNvPr id="35" name="วิธีร่วม 349"/>
           <p:cNvSpPr/>
           <p:nvPr/>
         </p:nvSpPr>
@@ -14700,7 +14700,7 @@
       </p:sp>
       <p:sp>
         <p:nvSpPr>
-          <p:cNvPr id="36" name="วงกลมไอคอน 348"/>
+          <p:cNvPr id="36" name="วงกลมไอคอน 350"/>
           <p:cNvSpPr/>
           <p:nvPr/>
         </p:nvSpPr>
@@ -14720,7 +14720,7 @@
       </p:sp>
       <p:pic>
         <p:nvPicPr>
-          <p:cNvPr id="37" name="ไอคอน FaGithub 349" descr="preencoded.png">    </p:cNvPr>
+          <p:cNvPr id="37" name="ไอคอน FaGithub 351" descr="preencoded.png">    </p:cNvPr>
           <p:cNvPicPr>
             <a:picLocks noChangeAspect="1"/>
           </p:cNvPicPr>
@@ -14744,7 +14744,7 @@
       </p:pic>
       <p:sp>
         <p:nvSpPr>
-          <p:cNvPr id="38" name="ข้อความ 350"/>
+          <p:cNvPr id="38" name="ข้อความ 352"/>
           <p:cNvSpPr txBox="1"/>
           <p:nvPr/>
         </p:nvSpPr>
@@ -14913,7 +14913,7 @@
       </p:sp>
       <p:sp>
         <p:nvSpPr>
-          <p:cNvPr id="3" name="วงกลมไอคอน 351"/>
+          <p:cNvPr id="3" name="วงกลมไอคอน 353"/>
           <p:cNvSpPr/>
           <p:nvPr/>
         </p:nvSpPr>
@@ -14933,7 +14933,7 @@
       </p:sp>
       <p:pic>
         <p:nvPicPr>
-          <p:cNvPr id="4" name="ไอคอน FaHandHoldingHeart 352" descr="preencoded.png">    </p:cNvPr>
+          <p:cNvPr id="4" name="ไอคอน FaHandHoldingHeart 354" descr="preencoded.png">    </p:cNvPr>
           <p:cNvPicPr>
             <a:picLocks noChangeAspect="1"/>
           </p:cNvPicPr>
@@ -14957,7 +14957,7 @@
       </p:pic>
       <p:sp>
         <p:nvSpPr>
-          <p:cNvPr id="5" name="ข้อความ 353"/>
+          <p:cNvPr id="5" name="ข้อความ 355"/>
           <p:cNvSpPr txBox="1"/>
           <p:nvPr/>
         </p:nvSpPr>
@@ -15010,7 +15010,7 @@
       </p:sp>
       <p:sp>
         <p:nvSpPr>
-          <p:cNvPr id="6" name="วงกลมไอคอน 354"/>
+          <p:cNvPr id="6" name="วงกลมไอคอน 356"/>
           <p:cNvSpPr/>
           <p:nvPr/>
         </p:nvSpPr>
@@ -15030,7 +15030,7 @@
       </p:sp>
       <p:pic>
         <p:nvPicPr>
-          <p:cNvPr id="7" name="ไอคอน FaBullseye 355" descr="preencoded.png">    </p:cNvPr>
+          <p:cNvPr id="7" name="ไอคอน FaBullseye 357" descr="preencoded.png">    </p:cNvPr>
           <p:cNvPicPr>
             <a:picLocks noChangeAspect="1"/>
           </p:cNvPicPr>
@@ -15054,7 +15054,7 @@
       </p:pic>
       <p:sp>
         <p:nvSpPr>
-          <p:cNvPr id="8" name="ข้อความ 356"/>
+          <p:cNvPr id="8" name="ข้อความ 358"/>
           <p:cNvSpPr txBox="1"/>
           <p:nvPr/>
         </p:nvSpPr>
@@ -15107,7 +15107,7 @@
       </p:sp>
       <p:sp>
         <p:nvSpPr>
-          <p:cNvPr id="9" name="วงกลมไอคอน 357"/>
+          <p:cNvPr id="9" name="วงกลมไอคอน 359"/>
           <p:cNvSpPr/>
           <p:nvPr/>
         </p:nvSpPr>
@@ -15127,7 +15127,7 @@
       </p:sp>
       <p:pic>
         <p:nvPicPr>
-          <p:cNvPr id="10" name="ไอคอน FaShareNodes 358" descr="preencoded.png">    </p:cNvPr>
+          <p:cNvPr id="10" name="ไอคอน FaShareNodes 360" descr="preencoded.png">    </p:cNvPr>
           <p:cNvPicPr>
             <a:picLocks noChangeAspect="1"/>
           </p:cNvPicPr>
@@ -15151,7 +15151,7 @@
       </p:pic>
       <p:sp>
         <p:nvSpPr>
-          <p:cNvPr id="11" name="ข้อความ 359"/>
+          <p:cNvPr id="11" name="ข้อความ 361"/>
           <p:cNvSpPr txBox="1"/>
           <p:nvPr/>
         </p:nvSpPr>
@@ -15252,7 +15252,7 @@
       </p:pic>
       <p:sp>
         <p:nvSpPr>
-          <p:cNvPr id="14" name="ข้อความ 360"/>
+          <p:cNvPr id="14" name="ข้อความ 362"/>
           <p:cNvSpPr txBox="1"/>
           <p:nvPr/>
         </p:nvSpPr>
@@ -15291,7 +15291,7 @@
       </p:sp>
       <p:sp>
         <p:nvSpPr>
-          <p:cNvPr id="15" name="ข้อความ 361"/>
+          <p:cNvPr id="15" name="ข้อความ 363"/>
           <p:cNvSpPr txBox="1"/>
           <p:nvPr/>
         </p:nvSpPr>
@@ -16987,7 +16987,7 @@
       </p:graphicFrame>
       <p:sp>
         <p:nvSpPr>
-          <p:cNvPr id="7" name="ข้อความ 362"/>
+          <p:cNvPr id="7" name="ข้อความ 364"/>
           <p:cNvSpPr txBox="1"/>
           <p:nvPr/>
         </p:nvSpPr>
@@ -17207,7 +17207,7 @@
       </p:sp>
       <p:sp>
         <p:nvSpPr>
-          <p:cNvPr id="6" name="เลขลำดับ 363"/>
+          <p:cNvPr id="6" name="เลขลำดับ 365"/>
           <p:cNvSpPr/>
           <p:nvPr/>
         </p:nvSpPr>
@@ -17248,7 +17248,7 @@
       </p:sp>
       <p:sp>
         <p:nvSpPr>
-          <p:cNvPr id="7" name="ข้อความ 364"/>
+          <p:cNvPr id="7" name="ข้อความ 366"/>
           <p:cNvSpPr txBox="1"/>
           <p:nvPr/>
         </p:nvSpPr>
@@ -17290,7 +17290,7 @@
                   <a:schemeClr val="accent5"/>
                 </a:solidFill>
               </a:rPr>
-              <a:t>ตามช่วง responsivity ใน datasheet TSL2591 และ LED ขาว 300–330 lm/W</a:t>
+              <a:t>ตามช่วง responsivity ใน datasheet TSL2591 และ LER ของสเปกตรัม LED ขาว 300–330 lm/W</a:t>
             </a:r>
             <a:endParaRPr lang="th-TH" sz="1600" dirty="0"/>
           </a:p>
@@ -17298,7 +17298,7 @@
       </p:sp>
       <p:sp>
         <p:nvSpPr>
-          <p:cNvPr id="8" name="เลขลำดับ 365"/>
+          <p:cNvPr id="8" name="เลขลำดับ 367"/>
           <p:cNvSpPr/>
           <p:nvPr/>
         </p:nvSpPr>
@@ -17339,7 +17339,7 @@
       </p:sp>
       <p:sp>
         <p:nvSpPr>
-          <p:cNvPr id="9" name="ข้อความ 366"/>
+          <p:cNvPr id="9" name="ข้อความ 368"/>
           <p:cNvSpPr txBox="1"/>
           <p:nvPr/>
         </p:nvSpPr>
@@ -17389,7 +17389,7 @@
       </p:sp>
       <p:sp>
         <p:nvSpPr>
-          <p:cNvPr id="10" name="เลขลำดับ 367"/>
+          <p:cNvPr id="10" name="เลขลำดับ 369"/>
           <p:cNvSpPr/>
           <p:nvPr/>
         </p:nvSpPr>
@@ -17430,7 +17430,7 @@
       </p:sp>
       <p:sp>
         <p:nvSpPr>
-          <p:cNvPr id="11" name="ข้อความ 368"/>
+          <p:cNvPr id="11" name="ข้อความ 370"/>
           <p:cNvSpPr txBox="1"/>
           <p:nvPr/>
         </p:nvSpPr>
@@ -17480,7 +17480,7 @@
       </p:sp>
       <p:sp>
         <p:nvSpPr>
-          <p:cNvPr id="12" name="เลขลำดับ 369"/>
+          <p:cNvPr id="12" name="เลขลำดับ 371"/>
           <p:cNvSpPr/>
           <p:nvPr/>
         </p:nvSpPr>
@@ -17521,7 +17521,7 @@
       </p:sp>
       <p:sp>
         <p:nvSpPr>
-          <p:cNvPr id="13" name="ข้อความ 370"/>
+          <p:cNvPr id="13" name="ข้อความ 372"/>
           <p:cNvSpPr txBox="1"/>
           <p:nvPr/>
         </p:nvSpPr>
@@ -17571,7 +17571,7 @@
       </p:sp>
       <p:sp>
         <p:nvSpPr>
-          <p:cNvPr id="14" name="เลขลำดับ 371"/>
+          <p:cNvPr id="14" name="เลขลำดับ 373"/>
           <p:cNvSpPr/>
           <p:nvPr/>
         </p:nvSpPr>
@@ -17612,7 +17612,7 @@
       </p:sp>
       <p:sp>
         <p:nvSpPr>
-          <p:cNvPr id="15" name="ข้อความ 372"/>
+          <p:cNvPr id="15" name="ข้อความ 374"/>
           <p:cNvSpPr txBox="1"/>
           <p:nvPr/>
         </p:nvSpPr>
@@ -17662,7 +17662,7 @@
       </p:sp>
       <p:sp>
         <p:nvSpPr>
-          <p:cNvPr id="16" name="ข้อควรรู้ 373"/>
+          <p:cNvPr id="16" name="ข้อควรรู้ 375"/>
           <p:cNvSpPr/>
           <p:nvPr/>
         </p:nvSpPr>
@@ -17686,7 +17686,7 @@
       </p:sp>
       <p:sp>
         <p:nvSpPr>
-          <p:cNvPr id="17" name="ข้อความ 374"/>
+          <p:cNvPr id="17" name="ข้อความ 376"/>
           <p:cNvSpPr txBox="1"/>
           <p:nvPr/>
         </p:nvSpPr>
@@ -20578,7 +20578,7 @@
       </p:graphicFrame>
       <p:sp>
         <p:nvSpPr>
-          <p:cNvPr id="7" name="ข้อความ 375"/>
+          <p:cNvPr id="7" name="ข้อความ 377"/>
           <p:cNvSpPr txBox="1"/>
           <p:nvPr/>
         </p:nvSpPr>
@@ -20752,7 +20752,7 @@
                   <a:schemeClr val="tx1"/>
                 </a:solidFill>
               </a:rPr>
-              <a:t>ถ้าถามว่า “ทำไม LED กระพริบ 100 Hz ไม่ใช่ 50 Hz ตามไฟบ้าน”</a:t>
+              <a:t>ถ้าถามว่า “ทำไม LED กะพริบ 100 Hz ไม่ใช่ 50 Hz ตามไฟบ้าน”</a:t>
             </a:r>
             <a:endParaRPr lang="en-US" sz="3000" dirty="0"/>
           </a:p>
@@ -20814,7 +20814,7 @@
       </p:graphicFrame>
       <p:sp>
         <p:nvSpPr>
-          <p:cNvPr id="7" name="คำอธิบาย 376"/>
+          <p:cNvPr id="7" name="คำอธิบาย 378"/>
           <p:cNvSpPr/>
           <p:nvPr/>
         </p:nvSpPr>
@@ -20838,7 +20838,7 @@
       </p:sp>
       <p:sp>
         <p:nvSpPr>
-          <p:cNvPr id="8" name="ข้อความ 377"/>
+          <p:cNvPr id="8" name="ข้อความ 379"/>
           <p:cNvSpPr txBox="1"/>
           <p:nvPr/>
         </p:nvSpPr>
@@ -20891,7 +20891,7 @@
       </p:sp>
       <p:sp>
         <p:nvSpPr>
-          <p:cNvPr id="9" name="คำอธิบาย 378"/>
+          <p:cNvPr id="9" name="คำอธิบาย 380"/>
           <p:cNvSpPr/>
           <p:nvPr/>
         </p:nvSpPr>
@@ -20915,7 +20915,7 @@
       </p:sp>
       <p:sp>
         <p:nvSpPr>
-          <p:cNvPr id="10" name="ข้อความ 379"/>
+          <p:cNvPr id="10" name="ข้อความ 381"/>
           <p:cNvSpPr txBox="1"/>
           <p:nvPr/>
         </p:nvSpPr>
@@ -20946,7 +20946,7 @@
                 <a:ea typeface="+mj-ea" pitchFamily="34" charset="-122"/>
                 <a:cs typeface="+mj-cs" pitchFamily="34" charset="-120"/>
               </a:rPr>
-              <a:t>ความสว่างไม่สนทิศ</a:t>
+              <a:t>ความสว่างไม่ขึ้นกับทิศกระแส</a:t>
             </a:r>
             <a:endParaRPr lang="th-TH" sz="1600" dirty="0"/>
           </a:p>
@@ -20968,7 +20968,7 @@
       </p:sp>
       <p:sp>
         <p:nvSpPr>
-          <p:cNvPr id="11" name="คำอธิบาย 380"/>
+          <p:cNvPr id="11" name="คำอธิบาย 382"/>
           <p:cNvSpPr/>
           <p:nvPr/>
         </p:nvSpPr>
@@ -20992,7 +20992,7 @@
       </p:sp>
       <p:sp>
         <p:nvSpPr>
-          <p:cNvPr id="12" name="ข้อความ 381"/>
+          <p:cNvPr id="12" name="ข้อความ 383"/>
           <p:cNvSpPr txBox="1"/>
           <p:nvPr/>
         </p:nvSpPr>
@@ -21045,7 +21045,7 @@
       </p:sp>
       <p:sp>
         <p:nvSpPr>
-          <p:cNvPr id="13" name="ข้อความ 382"/>
+          <p:cNvPr id="13" name="ข้อความ 384"/>
           <p:cNvSpPr txBox="1"/>
           <p:nvPr/>
         </p:nvSpPr>
@@ -21073,7 +21073,7 @@
                   <a:schemeClr val="accent5"/>
                 </a:solidFill>
               </a:rPr>
-              <a:t>driver แบบครึ่งคลื่นราคาถูกอาจกระพริบ 50 Hz · ไม่ว่าแบบใด integration 300 ms ก็ครบรอบพอดี</a:t>
+              <a:t>driver แบบครึ่งคลื่นราคาถูกอาจกะพริบ 50 Hz · ไม่ว่าแบบใด integration 300 ms ก็ครบรอบพอดี</a:t>
             </a:r>
             <a:endParaRPr lang="th-TH" sz="1400" dirty="0"/>
           </a:p>
@@ -22430,7 +22430,7 @@
                   <a:schemeClr val="tx1"/>
                 </a:solidFill>
               </a:rPr>
-              <a:t>เครื่องมาตรฐานแพง จึงมีได้ไม่กี่เครื่อง และวัดไม่ทั่วทุกห้อง</a:t>
+              <a:t>เครื่องมาตรฐานราคาสูง จึงจัดหาได้จำกัด และวัดไม่ทั่วทุกห้อง</a:t>
             </a:r>
             <a:endParaRPr lang="en-US" sz="3000" dirty="0"/>
           </a:p>
@@ -23123,7 +23123,7 @@
                 <a:ea typeface="+mj-ea" pitchFamily="34" charset="-122"/>
                 <a:cs typeface="+mj-cs" pitchFamily="34" charset="-120"/>
               </a:rPr>
-              <a:t>เครื่องถูก ไม่ชดเชย = อ่านต่ำ</a:t>
+              <a:t>ไม่ชดเชย = อ่านต่ำกว่าจริง</a:t>
             </a:r>
             <a:endParaRPr lang="th-TH" sz="1700" dirty="0"/>
           </a:p>
@@ -23521,7 +23521,7 @@
                   <a:schemeClr val="accent5"/>
                 </a:solidFill>
               </a:rPr>
-              <a:t>ความคลาดเคลื่อน ±7.3% ที่ 300 lux = ±22 lux กว้างกว่าความละเอียด 0.01 lux ราว 2,000 เท่า สิ่งที่ต้องรู้จริงคือ “อยู่ฝั่งไหนของเส้น”</a:t>
+              <a:t>ความคลาดเคลื่อน ±7.3% ที่ 300 lux = ±22 lux (จากแบบจำลอง) กว้างกว่าความละเอียด 0.01 lux ราว 2,200 เท่า สิ่งที่ต้องรู้จริงคือ “อยู่ฝั่งไหนของเส้น”</a:t>
             </a:r>
             <a:endParaRPr lang="th-TH" sz="1600" dirty="0"/>
           </a:p>
@@ -23578,7 +23578,7 @@
                   <a:schemeClr val="bg1"/>
                 </a:solidFill>
               </a:rPr>
-              <a:t>ปรับปรุงได้ทันที</a:t>
+              <a:t>วางแผนปรับปรุง</a:t>
             </a:r>
             <a:endParaRPr lang="th-TH" sz="1800" dirty="0"/>
           </a:p>
@@ -26770,7 +26770,7 @@
                   <a:schemeClr val="tx1"/>
                 </a:solidFill>
               </a:rPr>
-              <a:t>ต่อวงจร 2 สาย ใช้ไฟจาก power bank และพิมพ์กล่องเอง</a:t>
+              <a:t>บัส I²C 2 สายสัญญาณ ไฟจาก power bank และพิมพ์กล่องเอง</a:t>
             </a:r>
             <a:endParaRPr lang="en-US" sz="3000" dirty="0"/>
           </a:p>
@@ -27278,7 +27278,7 @@
                   <a:schemeClr val="tx1"/>
                 </a:solidFill>
               </a:rPr>
-              <a:t>แสง LED ไม่เหมือนแสงธรรมชาติ และกระพริบตามไฟ 50 Hz</a:t>
+              <a:t>LED ไม่เหมือนแสงธรรมชาติ และกะพริบ 100 ครั้ง/วินาทีจากไฟ 50 Hz</a:t>
             </a:r>
             <a:endParaRPr lang="en-US" sz="3000" dirty="0"/>
           </a:p>
@@ -27716,7 +27716,49 @@
       </p:graphicFrame>
       <p:sp>
         <p:nvSpPr>
-          <p:cNvPr id="15" name="สรุปผลเฉลี่ย 180"/>
+          <p:cNvPr id="15" name="ป้ายผลจำลอง 180"/>
+          <p:cNvSpPr/>
+          <p:nvPr/>
+        </p:nvSpPr>
+        <p:spPr>
+          <a:xfrm>
+            <a:off x="9400032" y="4572000"/>
+            <a:ext cx="2240280" cy="292608"/>
+          </a:xfrm>
+          <a:prstGeom prst="roundRect">
+            <a:avLst>
+              <a:gd name="adj" fmla="val 25000"/>
+            </a:avLst>
+          </a:prstGeom>
+          <a:solidFill>
+            <a:schemeClr val="accent4">
+              <a:alpha val="30000"/>
+            </a:schemeClr>
+          </a:solidFill>
+          <a:ln/>
+        </p:spPr>
+        <p:txBody>
+          <a:bodyPr wrap="square" lIns="0" tIns="0" rIns="0" bIns="0" rtlCol="0" anchor="ctr"/>
+          <a:lstStyle/>
+          <a:p>
+            <a:pPr algn="ctr" indent="0" marL="0">
+              <a:buNone/>
+            </a:pPr>
+            <a:r>
+              <a:rPr lang="th-TH" altLang="en-US" sz="1100" b="1" dirty="0">
+                <a:solidFill>
+                  <a:schemeClr val="tx1"/>
+                </a:solidFill>
+              </a:rPr>
+              <a:t>ผลจำลอง · ไม่ใช่ข้อมูลวัดจริง</a:t>
+            </a:r>
+            <a:endParaRPr lang="th-TH" sz="1100" dirty="0"/>
+          </a:p>
+        </p:txBody>
+      </p:sp>
+      <p:sp>
+        <p:nvSpPr>
+          <p:cNvPr id="16" name="สรุปผลเฉลี่ย 182"/>
           <p:cNvSpPr/>
           <p:nvPr/>
         </p:nvSpPr>
@@ -27740,7 +27782,7 @@
       </p:sp>
       <p:sp>
         <p:nvSpPr>
-          <p:cNvPr id="16" name="ข้อความ 181"/>
+          <p:cNvPr id="17" name="ข้อความ 183"/>
           <p:cNvSpPr txBox="1"/>
           <p:nvPr/>
         </p:nvSpPr>
@@ -27793,7 +27835,7 @@
       </p:sp>
       <p:sp>
         <p:nvSpPr>
-          <p:cNvPr id="17" name="สรุป auto-range 182"/>
+          <p:cNvPr id="18" name="สรุป auto-range 184"/>
           <p:cNvSpPr/>
           <p:nvPr/>
         </p:nvSpPr>
@@ -27817,7 +27859,7 @@
       </p:sp>
       <p:sp>
         <p:nvSpPr>
-          <p:cNvPr id="18" name="ข้อความ 183"/>
+          <p:cNvPr id="19" name="ข้อความ 185"/>
           <p:cNvSpPr txBox="1"/>
           <p:nvPr/>
         </p:nvSpPr>
@@ -27862,7 +27904,7 @@
                   <a:schemeClr val="tx1"/>
                 </a:solidFill>
               </a:rPr>
-              <a:t>ระดับที่ auto-range แกว่งจน SATURATED (v1.0 → v1.1 จาก 521)</a:t>
+              <a:t>ระดับแสงที่แกว่งจน SATURATED จาก 521 ระดับ (v1.0 → v1.1)</a:t>
             </a:r>
             <a:endParaRPr lang="th-TH" sz="1600" dirty="0"/>
           </a:p>

--- a/presentation/LightCheck-KM_oral_KMDay2569.pptx
+++ b/presentation/LightCheck-KM_oral_KMDay2569.pptx
@@ -127,19 +127,19 @@
   <p:extLst>
     <p:ext uri="{521415D9-36F7-43E2-AB2F-B90AF26B5E84}">
       <p14:sectionLst xmlns:p14="http://schemas.microsoft.com/office/powerpoint/2010/main">
-        <p14:section name="เปิดเรื่อง" id="{f5fa6dc7-5266-3e7b-99e6-3203502573b0}">
+        <p14:section name="เปิดเรื่อง" id="{643b0efb-c53d-4232-aa53-5e8d53ea215d}">
           <p14:sldIdLst>
             <p14:sldId id="256"/>
           </p14:sldIdLst>
         </p14:section>
-        <p14:section name="ทำไมต้องวัดแสง" id="{9625aa60-a6f3-d3d8-edfc-06fe9047c1b8}">
+        <p14:section name="ทำไมต้องวัดแสง" id="{8558d561-d915-9173-976d-b3e2ba849987}">
           <p14:sldIdLst>
             <p14:sldId id="257"/>
             <p14:sldId id="258"/>
             <p14:sldId id="259"/>
           </p14:sldIdLst>
         </p14:section>
-        <p14:section name="แนวคิดและวิธีการ" id="{508ef587-d037-536d-8e0e-bb4567f159a5}">
+        <p14:section name="แนวคิดและวิธีการ" id="{e9673847-32bd-c90e-bfa5-f24f4f44d566}">
           <p14:sldIdLst>
             <p14:sldId id="260"/>
             <p14:sldId id="261"/>
@@ -149,13 +149,13 @@
             <p14:sldId id="265"/>
           </p14:sldIdLst>
         </p14:section>
-        <p14:section name="ผลลัพธ์" id="{59f33742-8be4-b413-41f6-9a02cf5801f1}">
+        <p14:section name="ผลลัพธ์" id="{09e60a8c-fbf5-d00a-b6fa-30b608f9ff2b}">
           <p14:sldIdLst>
             <p14:sldId id="266"/>
             <p14:sldId id="267"/>
           </p14:sldIdLst>
         </p14:section>
-        <p14:section name="ใช้ประโยชน์และเผยแพร่" id="{510ab7aa-1213-a921-54b3-4afceac8af4c}">
+        <p14:section name="ใช้ประโยชน์และเผยแพร่" id="{0b36b5d1-e943-a076-7fa2-9be0197a284a}">
           <p14:sldIdLst>
             <p14:sldId id="268"/>
             <p14:sldId id="269"/>
@@ -163,12 +163,12 @@
             <p14:sldId id="271"/>
           </p14:sldIdLst>
         </p14:section>
-        <p14:section name="สรุป" id="{7c7b7feb-a096-dbdb-13de-aafc9c4071a9}">
+        <p14:section name="สรุป" id="{3c1b578d-476d-1a81-7d0d-8a278a53fb6b}">
           <p14:sldIdLst>
             <p14:sldId id="272"/>
           </p14:sldIdLst>
         </p14:section>
-        <p14:section name="สำรองตอบคำถาม" id="{7447f60a-364e-acae-a3f2-2e8f4c2e10d9}">
+        <p14:section name="สำรองตอบคำถาม" id="{da34b6d8-e9d5-f051-d69d-b750f9be012c}">
           <p14:sldIdLst>
             <p14:sldId id="273"/>
             <p14:sldId id="274"/>
@@ -5202,7 +5202,7 @@
             <a:r>
               <a:rPr lang="en-US" dirty="0"/>
               <a:t>องค์ความรู้ทั้งชุดเปิดเป็น public repository บน GitHub ให้บุคลากรทุกส่วนงานเข้าถึง ทำซ้ำ และต่อยอดได้เองโดยไม่ต้องขอสิทธิ์
-มีเอกสารและคู่มือ 20 ฉบับ ไฟล์ STL 2 ไฟล์ เครื่องมือ Python 19 ตัว ใช้สัญญาอนุญาต MIT สำหรับโค้ด และ CC BY 4.0 สำหรับเอกสารและฮาร์ดแวร์
+มีเอกสารและคู่มือ 20 ฉบับ ไฟล์ STL 5 ไฟล์ เครื่องมือ Python 20 ตัว ใช้สัญญาอนุญาต MIT สำหรับโค้ด และ CC BY 4.0 สำหรับเอกสารและฮาร์ดแวร์
 ช่องทางถาม-ตอบและขอรับการถ่ายทอดคือ GitHub Issues คำตอบสะสมเป็นความรู้ให้คนถัดไป และทุกตัวเลขจากแบบจำลองสร้างซ้ำได้ด้วยคำสั่ง make all</a:t>
             </a:r>
             <a:endParaRPr lang="en-US" dirty="0"/>
@@ -12818,7 +12818,7 @@
                 <a:ea typeface="+mj-ea" pitchFamily="34" charset="-122"/>
                 <a:cs typeface="+mj-cs" pitchFamily="34" charset="-120"/>
               </a:rPr>
-              <a:t>2</a:t>
+              <a:t>5</a:t>
             </a:r>
             <a:endParaRPr lang="en-US" sz="3200" dirty="0"/>
           </a:p>
@@ -12917,7 +12917,7 @@
                 <a:ea typeface="+mj-ea" pitchFamily="34" charset="-122"/>
                 <a:cs typeface="+mj-cs" pitchFamily="34" charset="-120"/>
               </a:rPr>
-              <a:t>19</a:t>
+              <a:t>20</a:t>
             </a:r>
             <a:endParaRPr lang="en-US" sz="3200" dirty="0"/>
           </a:p>
